--- a/public/lessons/year-6-maths/summer/week-27/translate-shapes/teaching-powerpoint-v1.pptx
+++ b/public/lessons/year-6-maths/summer/week-27/translate-shapes/teaching-powerpoint-v1.pptx
@@ -2,24 +2,24 @@
 <file path=ppt/presentation.xml><?xml version="1.0" encoding="utf-8"?>
 <p:presentation xmlns:p="http://schemas.openxmlformats.org/presentationml/2006/main">
   <p:sldMasterIdLst>
-    <p:sldMasterId xmlns:r="http://schemas.openxmlformats.org/officeDocument/2006/relationships" id="2147483648" r:id="R855a7532f6b2433a"/>
+    <p:sldMasterId xmlns:r="http://schemas.openxmlformats.org/officeDocument/2006/relationships" id="2147483648" r:id="R817f3d695d934a7e"/>
   </p:sldMasterIdLst>
   <p:notesMasterIdLst>
-    <p:notesMasterId xmlns:r="http://schemas.openxmlformats.org/officeDocument/2006/relationships" r:id="R7034f8e22a0d4a50"/>
+    <p:notesMasterId xmlns:r="http://schemas.openxmlformats.org/officeDocument/2006/relationships" r:id="R37690be606304ddc"/>
   </p:notesMasterIdLst>
   <p:sldIdLst>
-    <p:sldId xmlns:r="http://schemas.openxmlformats.org/officeDocument/2006/relationships" id="256" r:id="R5768664bb212458a"/>
-    <p:sldId xmlns:r="http://schemas.openxmlformats.org/officeDocument/2006/relationships" id="257" r:id="R23f78854266840f4"/>
-    <p:sldId xmlns:r="http://schemas.openxmlformats.org/officeDocument/2006/relationships" id="258" r:id="R1d81c57338bc4e41"/>
-    <p:sldId xmlns:r="http://schemas.openxmlformats.org/officeDocument/2006/relationships" id="259" r:id="R3e16cbf34c164881"/>
-    <p:sldId xmlns:r="http://schemas.openxmlformats.org/officeDocument/2006/relationships" id="260" r:id="Rf2c2d2ddd2dc432c"/>
-    <p:sldId xmlns:r="http://schemas.openxmlformats.org/officeDocument/2006/relationships" id="261" r:id="R3e1dfe30cd254959"/>
-    <p:sldId xmlns:r="http://schemas.openxmlformats.org/officeDocument/2006/relationships" id="262" r:id="R71d6e2caa7a64fdf"/>
-    <p:sldId xmlns:r="http://schemas.openxmlformats.org/officeDocument/2006/relationships" id="263" r:id="Ra8b04471a57c4484"/>
-    <p:sldId xmlns:r="http://schemas.openxmlformats.org/officeDocument/2006/relationships" id="264" r:id="R6899bf9e58e2463f"/>
-    <p:sldId xmlns:r="http://schemas.openxmlformats.org/officeDocument/2006/relationships" id="265" r:id="R6ed3b9543f30432a"/>
-    <p:sldId xmlns:r="http://schemas.openxmlformats.org/officeDocument/2006/relationships" id="266" r:id="Rb541d237c8754775"/>
-    <p:sldId xmlns:r="http://schemas.openxmlformats.org/officeDocument/2006/relationships" id="267" r:id="Re7a36876b17e4b44"/>
+    <p:sldId xmlns:r="http://schemas.openxmlformats.org/officeDocument/2006/relationships" id="256" r:id="R835b785c59a14a0d"/>
+    <p:sldId xmlns:r="http://schemas.openxmlformats.org/officeDocument/2006/relationships" id="257" r:id="R85c1b4e19f3b408b"/>
+    <p:sldId xmlns:r="http://schemas.openxmlformats.org/officeDocument/2006/relationships" id="258" r:id="Rd2795eddc517466e"/>
+    <p:sldId xmlns:r="http://schemas.openxmlformats.org/officeDocument/2006/relationships" id="259" r:id="R66a01c0af29c42e7"/>
+    <p:sldId xmlns:r="http://schemas.openxmlformats.org/officeDocument/2006/relationships" id="260" r:id="R80ccbe3794be4c75"/>
+    <p:sldId xmlns:r="http://schemas.openxmlformats.org/officeDocument/2006/relationships" id="261" r:id="R85bb188390784473"/>
+    <p:sldId xmlns:r="http://schemas.openxmlformats.org/officeDocument/2006/relationships" id="262" r:id="Rc8bcb8b17d414d57"/>
+    <p:sldId xmlns:r="http://schemas.openxmlformats.org/officeDocument/2006/relationships" id="263" r:id="R9535abdc55e04236"/>
+    <p:sldId xmlns:r="http://schemas.openxmlformats.org/officeDocument/2006/relationships" id="264" r:id="R808d38a0f4af4631"/>
+    <p:sldId xmlns:r="http://schemas.openxmlformats.org/officeDocument/2006/relationships" id="265" r:id="Ree536a702ed94bb6"/>
+    <p:sldId xmlns:r="http://schemas.openxmlformats.org/officeDocument/2006/relationships" id="266" r:id="R65b6d07fd4854e00"/>
+    <p:sldId xmlns:r="http://schemas.openxmlformats.org/officeDocument/2006/relationships" id="267" r:id="R39f6781067c34f3c"/>
   </p:sldIdLst>
   <p:sldSz cx="12192000" cy="6858000"/>
   <p:notesSz cx="6858000" cy="9144000"/>
@@ -873,7 +873,7 @@
           <a:lstStyle xmlns:a="http://schemas.openxmlformats.org/drawingml/2006/main"/>
           <a:p xmlns:a="http://schemas.openxmlformats.org/drawingml/2006/main">
             <a:r>
-              <a:t>I do. Reveal the question, setup and each calculation stage one click at a time. Pupils watch before copying. Model answer: (1, 3).</a:t>
+              <a:t>I do. Reveal the question, then reveal each mathematical change one click at a time. Point to the numbers and operation that changed before moving to the next line. Final answer: (1, 3).</a:t>
             </a:r>
           </a:p>
         </p:txBody>
@@ -1291,7 +1291,7 @@
   </p:cSld>
   <p:clrMap bg1="lt1" tx1="dk1" bg2="lt2" tx2="dk2" accent1="accent1" accent2="accent2" accent3="accent3" accent4="accent4" accent5="accent5" accent6="accent6" hlink="hlink" folHlink="folHlink"/>
   <p:sldLayoutIdLst>
-    <p:sldLayoutId xmlns:r="http://schemas.openxmlformats.org/officeDocument/2006/relationships" id="2147483649" r:id="Rf6fedbdb76804ea7"/>
+    <p:sldLayoutId xmlns:r="http://schemas.openxmlformats.org/officeDocument/2006/relationships" id="2147483649" r:id="Rbae31a67f260494c"/>
   </p:sldLayoutIdLst>
   <p:txStyles>
     <p:titleStyle>
@@ -1842,7 +1842,7 @@
           <p:cNvPr id="12" name="">
             <a:extLst xmlns:a="http://schemas.openxmlformats.org/drawingml/2006/main">
               <a:ext uri="{FF2B5EF4-FFF2-40B4-BE49-F238E27FC236}">
-                <a16:creationId xmlns:a16="http://schemas.microsoft.com/office/drawing/2014/main" id="{25D84736-63B4-4121-BC6D-C00AFEFB4588}"/>
+                <a16:creationId xmlns:a16="http://schemas.microsoft.com/office/drawing/2014/main" id="{C39E8D9D-D74D-4230-892C-F1A70C22596C}"/>
               </a:ext>
             </a:extLst>
           </p:cNvPr>
@@ -1874,7 +1874,7 @@
           <p:cNvPr id="2" name="">
             <a:extLst xmlns:a="http://schemas.openxmlformats.org/drawingml/2006/main">
               <a:ext uri="{FF2B5EF4-FFF2-40B4-BE49-F238E27FC236}">
-                <a16:creationId xmlns:a16="http://schemas.microsoft.com/office/drawing/2014/main" id="{607DE7C2-B09F-4043-9230-2A3C3EE7EC91}"/>
+                <a16:creationId xmlns:a16="http://schemas.microsoft.com/office/drawing/2014/main" id="{18C4A3F0-2442-48B6-A668-9253296276C2}"/>
               </a:ext>
             </a:extLst>
           </p:cNvPr>
@@ -1931,7 +1931,7 @@
           <p:cNvPr id="3" name="">
             <a:extLst xmlns:a="http://schemas.openxmlformats.org/drawingml/2006/main">
               <a:ext uri="{FF2B5EF4-FFF2-40B4-BE49-F238E27FC236}">
-                <a16:creationId xmlns:a16="http://schemas.microsoft.com/office/drawing/2014/main" id="{7C486D2B-A9BD-483C-A687-98E5760F31E1}"/>
+                <a16:creationId xmlns:a16="http://schemas.microsoft.com/office/drawing/2014/main" id="{1EE2DB59-FEFA-4EB6-A3E9-8AE74A1F1149}"/>
               </a:ext>
             </a:extLst>
           </p:cNvPr>
@@ -1965,7 +1965,7 @@
           <p:cNvPr id="4" name="">
             <a:extLst xmlns:a="http://schemas.openxmlformats.org/drawingml/2006/main">
               <a:ext uri="{FF2B5EF4-FFF2-40B4-BE49-F238E27FC236}">
-                <a16:creationId xmlns:a16="http://schemas.microsoft.com/office/drawing/2014/main" id="{64AB24E9-7093-4992-B256-62DBCCB88C1F}"/>
+                <a16:creationId xmlns:a16="http://schemas.microsoft.com/office/drawing/2014/main" id="{A5D1F25A-244F-413A-AFC1-0C0099C8628A}"/>
               </a:ext>
             </a:extLst>
           </p:cNvPr>
@@ -2022,7 +2022,7 @@
           <p:cNvPr id="5" name="">
             <a:extLst xmlns:a="http://schemas.openxmlformats.org/drawingml/2006/main">
               <a:ext uri="{FF2B5EF4-FFF2-40B4-BE49-F238E27FC236}">
-                <a16:creationId xmlns:a16="http://schemas.microsoft.com/office/drawing/2014/main" id="{8F397EFA-10D0-437D-9120-9BA84498E920}"/>
+                <a16:creationId xmlns:a16="http://schemas.microsoft.com/office/drawing/2014/main" id="{6BE01E26-B77F-4311-9ED0-C7BA7717423A}"/>
               </a:ext>
             </a:extLst>
           </p:cNvPr>
@@ -2079,7 +2079,7 @@
           <p:cNvPr id="6" name="">
             <a:extLst xmlns:a="http://schemas.openxmlformats.org/drawingml/2006/main">
               <a:ext uri="{FF2B5EF4-FFF2-40B4-BE49-F238E27FC236}">
-                <a16:creationId xmlns:a16="http://schemas.microsoft.com/office/drawing/2014/main" id="{074984FA-4F85-48B9-9FA1-16EA7B3CDC84}"/>
+                <a16:creationId xmlns:a16="http://schemas.microsoft.com/office/drawing/2014/main" id="{5D66F7C1-1FA2-471A-A076-1DC9BE74BA52}"/>
               </a:ext>
             </a:extLst>
           </p:cNvPr>
@@ -2113,7 +2113,7 @@
           <p:cNvPr id="7" name="">
             <a:extLst xmlns:a="http://schemas.openxmlformats.org/drawingml/2006/main">
               <a:ext uri="{FF2B5EF4-FFF2-40B4-BE49-F238E27FC236}">
-                <a16:creationId xmlns:a16="http://schemas.microsoft.com/office/drawing/2014/main" id="{08F295A5-052C-412D-8050-6E26D1683F97}"/>
+                <a16:creationId xmlns:a16="http://schemas.microsoft.com/office/drawing/2014/main" id="{12F71CF2-F956-49EC-BC9D-46858039908A}"/>
               </a:ext>
             </a:extLst>
           </p:cNvPr>
@@ -2170,7 +2170,7 @@
           <p:cNvPr id="8" name="">
             <a:extLst xmlns:a="http://schemas.openxmlformats.org/drawingml/2006/main">
               <a:ext uri="{FF2B5EF4-FFF2-40B4-BE49-F238E27FC236}">
-                <a16:creationId xmlns:a16="http://schemas.microsoft.com/office/drawing/2014/main" id="{AB7EA817-3CF1-4AD4-83A3-E83BF902F1EB}"/>
+                <a16:creationId xmlns:a16="http://schemas.microsoft.com/office/drawing/2014/main" id="{189E7BEB-325E-45F0-80AA-BAFB97C72B2A}"/>
               </a:ext>
             </a:extLst>
           </p:cNvPr>
@@ -2227,7 +2227,7 @@
           <p:cNvPr id="9" name="">
             <a:extLst xmlns:a="http://schemas.openxmlformats.org/drawingml/2006/main">
               <a:ext uri="{FF2B5EF4-FFF2-40B4-BE49-F238E27FC236}">
-                <a16:creationId xmlns:a16="http://schemas.microsoft.com/office/drawing/2014/main" id="{2FCAD02D-9488-41FE-A093-73410D3A5D58}"/>
+                <a16:creationId xmlns:a16="http://schemas.microsoft.com/office/drawing/2014/main" id="{DD186528-55A7-4E40-9EFB-1BDF390F3D84}"/>
               </a:ext>
             </a:extLst>
           </p:cNvPr>
@@ -2284,7 +2284,7 @@
           <p:cNvPr id="10" name="">
             <a:extLst xmlns:a="http://schemas.openxmlformats.org/drawingml/2006/main">
               <a:ext uri="{FF2B5EF4-FFF2-40B4-BE49-F238E27FC236}">
-                <a16:creationId xmlns:a16="http://schemas.microsoft.com/office/drawing/2014/main" id="{EE44096F-E843-4588-8A09-ADFE4C83993C}"/>
+                <a16:creationId xmlns:a16="http://schemas.microsoft.com/office/drawing/2014/main" id="{FC4C5A05-F8B1-419D-804A-0683DF1A92D4}"/>
               </a:ext>
             </a:extLst>
           </p:cNvPr>
@@ -2341,7 +2341,7 @@
           <p:cNvPr id="11" name="">
             <a:extLst xmlns:a="http://schemas.openxmlformats.org/drawingml/2006/main">
               <a:ext uri="{FF2B5EF4-FFF2-40B4-BE49-F238E27FC236}">
-                <a16:creationId xmlns:a16="http://schemas.microsoft.com/office/drawing/2014/main" id="{6648CD2C-15A0-4928-93D4-409B2FAB2794}"/>
+                <a16:creationId xmlns:a16="http://schemas.microsoft.com/office/drawing/2014/main" id="{4918D6A1-0783-4BD9-AC09-92B5A2626C91}"/>
               </a:ext>
             </a:extLst>
           </p:cNvPr>
@@ -2396,7 +2396,7 @@
     </p:spTree>
     <p:extLst>
       <p:ext uri="{BB962C8B-B14F-4D97-AF65-F5344CB8AC3E}">
-        <p14:creationId xmlns:p14="http://schemas.microsoft.com/office/powerpoint/2010/main" val="1620761555"/>
+        <p14:creationId xmlns:p14="http://schemas.microsoft.com/office/powerpoint/2010/main" val="1509744161"/>
       </p:ext>
     </p:extLst>
   </p:cSld>
@@ -2427,7 +2427,7 @@
           <p:cNvPr id="14" name="">
             <a:extLst xmlns:a="http://schemas.openxmlformats.org/drawingml/2006/main">
               <a:ext uri="{FF2B5EF4-FFF2-40B4-BE49-F238E27FC236}">
-                <a16:creationId xmlns:a16="http://schemas.microsoft.com/office/drawing/2014/main" id="{9769B9C3-80B0-4DA3-9419-5846FA30DA39}"/>
+                <a16:creationId xmlns:a16="http://schemas.microsoft.com/office/drawing/2014/main" id="{58C1E03B-8064-4D09-8B85-62A187A599EC}"/>
               </a:ext>
             </a:extLst>
           </p:cNvPr>
@@ -2459,7 +2459,7 @@
           <p:cNvPr id="2" name="">
             <a:extLst xmlns:a="http://schemas.openxmlformats.org/drawingml/2006/main">
               <a:ext uri="{FF2B5EF4-FFF2-40B4-BE49-F238E27FC236}">
-                <a16:creationId xmlns:a16="http://schemas.microsoft.com/office/drawing/2014/main" id="{FF8172F1-25F7-4C27-AE16-B5B0BA47EE19}"/>
+                <a16:creationId xmlns:a16="http://schemas.microsoft.com/office/drawing/2014/main" id="{156AE93D-9396-4F6F-A7EC-AE3A774AB6B1}"/>
               </a:ext>
             </a:extLst>
           </p:cNvPr>
@@ -2516,7 +2516,7 @@
           <p:cNvPr id="3" name="">
             <a:extLst xmlns:a="http://schemas.openxmlformats.org/drawingml/2006/main">
               <a:ext uri="{FF2B5EF4-FFF2-40B4-BE49-F238E27FC236}">
-                <a16:creationId xmlns:a16="http://schemas.microsoft.com/office/drawing/2014/main" id="{E16BFF4A-258E-4161-8FAF-D5F5EF644619}"/>
+                <a16:creationId xmlns:a16="http://schemas.microsoft.com/office/drawing/2014/main" id="{EBEAD672-7726-4B94-89D9-9633CF08737C}"/>
               </a:ext>
             </a:extLst>
           </p:cNvPr>
@@ -2548,7 +2548,7 @@
           <p:cNvPr id="4" name="">
             <a:extLst xmlns:a="http://schemas.openxmlformats.org/drawingml/2006/main">
               <a:ext uri="{FF2B5EF4-FFF2-40B4-BE49-F238E27FC236}">
-                <a16:creationId xmlns:a16="http://schemas.microsoft.com/office/drawing/2014/main" id="{3CE98083-9060-477E-AEB1-50C91694C7D2}"/>
+                <a16:creationId xmlns:a16="http://schemas.microsoft.com/office/drawing/2014/main" id="{71E638B7-117F-43E2-9BF5-E7B08021B7DD}"/>
               </a:ext>
             </a:extLst>
           </p:cNvPr>
@@ -2605,7 +2605,7 @@
           <p:cNvPr id="5" name="">
             <a:extLst xmlns:a="http://schemas.openxmlformats.org/drawingml/2006/main">
               <a:ext uri="{FF2B5EF4-FFF2-40B4-BE49-F238E27FC236}">
-                <a16:creationId xmlns:a16="http://schemas.microsoft.com/office/drawing/2014/main" id="{B2C0D75E-7422-487B-A161-0CA25659096D}"/>
+                <a16:creationId xmlns:a16="http://schemas.microsoft.com/office/drawing/2014/main" id="{FF11F06C-8AAF-4336-82A0-5EEB0B31398B}"/>
               </a:ext>
             </a:extLst>
           </p:cNvPr>
@@ -2662,7 +2662,7 @@
           <p:cNvPr id="6" name="">
             <a:extLst xmlns:a="http://schemas.openxmlformats.org/drawingml/2006/main">
               <a:ext uri="{FF2B5EF4-FFF2-40B4-BE49-F238E27FC236}">
-                <a16:creationId xmlns:a16="http://schemas.microsoft.com/office/drawing/2014/main" id="{1EE2F37A-5B0F-422D-89A3-B34DBAB2BC8C}"/>
+                <a16:creationId xmlns:a16="http://schemas.microsoft.com/office/drawing/2014/main" id="{CDE6BC2C-661F-4DAD-8B69-CA69695B5EAE}"/>
               </a:ext>
             </a:extLst>
           </p:cNvPr>
@@ -2719,7 +2719,7 @@
           <p:cNvPr id="7" name="">
             <a:extLst xmlns:a="http://schemas.openxmlformats.org/drawingml/2006/main">
               <a:ext uri="{FF2B5EF4-FFF2-40B4-BE49-F238E27FC236}">
-                <a16:creationId xmlns:a16="http://schemas.microsoft.com/office/drawing/2014/main" id="{E4EE13F2-5836-490F-8539-725C38E6F4C3}"/>
+                <a16:creationId xmlns:a16="http://schemas.microsoft.com/office/drawing/2014/main" id="{968DF58D-21E0-4395-9894-FAF2B038A2F9}"/>
               </a:ext>
             </a:extLst>
           </p:cNvPr>
@@ -2751,7 +2751,7 @@
           <p:cNvPr id="8" name="">
             <a:extLst xmlns:a="http://schemas.openxmlformats.org/drawingml/2006/main">
               <a:ext uri="{FF2B5EF4-FFF2-40B4-BE49-F238E27FC236}">
-                <a16:creationId xmlns:a16="http://schemas.microsoft.com/office/drawing/2014/main" id="{1889B297-EDCA-47EA-AD20-E258C2A5B41A}"/>
+                <a16:creationId xmlns:a16="http://schemas.microsoft.com/office/drawing/2014/main" id="{9FFC8D2F-9CE7-4F13-9E1A-6582895BE8FE}"/>
               </a:ext>
             </a:extLst>
           </p:cNvPr>
@@ -2808,7 +2808,7 @@
           <p:cNvPr id="9" name="">
             <a:extLst xmlns:a="http://schemas.openxmlformats.org/drawingml/2006/main">
               <a:ext uri="{FF2B5EF4-FFF2-40B4-BE49-F238E27FC236}">
-                <a16:creationId xmlns:a16="http://schemas.microsoft.com/office/drawing/2014/main" id="{1673BBB6-F65D-4678-A086-32B3885CAB8F}"/>
+                <a16:creationId xmlns:a16="http://schemas.microsoft.com/office/drawing/2014/main" id="{DC47569C-2156-4F19-B1B9-D5AEC7ABFB8D}"/>
               </a:ext>
             </a:extLst>
           </p:cNvPr>
@@ -2865,7 +2865,7 @@
           <p:cNvPr id="10" name="">
             <a:extLst xmlns:a="http://schemas.openxmlformats.org/drawingml/2006/main">
               <a:ext uri="{FF2B5EF4-FFF2-40B4-BE49-F238E27FC236}">
-                <a16:creationId xmlns:a16="http://schemas.microsoft.com/office/drawing/2014/main" id="{EA13BF70-B3C3-4048-BAA5-A6C15B09AFDF}"/>
+                <a16:creationId xmlns:a16="http://schemas.microsoft.com/office/drawing/2014/main" id="{A40E6D84-2DFF-4118-92C5-03B6B48478E6}"/>
               </a:ext>
             </a:extLst>
           </p:cNvPr>
@@ -2922,7 +2922,7 @@
           <p:cNvPr id="11" name="">
             <a:extLst xmlns:a="http://schemas.openxmlformats.org/drawingml/2006/main">
               <a:ext uri="{FF2B5EF4-FFF2-40B4-BE49-F238E27FC236}">
-                <a16:creationId xmlns:a16="http://schemas.microsoft.com/office/drawing/2014/main" id="{EE092B81-2158-43E2-9E17-D034A4EB01D2}"/>
+                <a16:creationId xmlns:a16="http://schemas.microsoft.com/office/drawing/2014/main" id="{49C5BBCB-3CAB-4BFB-B03D-3084ACE8A86A}"/>
               </a:ext>
             </a:extLst>
           </p:cNvPr>
@@ -2979,7 +2979,7 @@
           <p:cNvPr id="12" name="">
             <a:extLst xmlns:a="http://schemas.openxmlformats.org/drawingml/2006/main">
               <a:ext uri="{FF2B5EF4-FFF2-40B4-BE49-F238E27FC236}">
-                <a16:creationId xmlns:a16="http://schemas.microsoft.com/office/drawing/2014/main" id="{F3FAC7AC-E53F-49AD-986E-03DB940CA9F0}"/>
+                <a16:creationId xmlns:a16="http://schemas.microsoft.com/office/drawing/2014/main" id="{9BF103CA-1999-4E27-92D3-AF92DF049F00}"/>
               </a:ext>
             </a:extLst>
           </p:cNvPr>
@@ -3036,7 +3036,7 @@
           <p:cNvPr id="13" name="">
             <a:extLst xmlns:a="http://schemas.openxmlformats.org/drawingml/2006/main">
               <a:ext uri="{FF2B5EF4-FFF2-40B4-BE49-F238E27FC236}">
-                <a16:creationId xmlns:a16="http://schemas.microsoft.com/office/drawing/2014/main" id="{07009B4A-9994-4F27-B19E-B53F1997104F}"/>
+                <a16:creationId xmlns:a16="http://schemas.microsoft.com/office/drawing/2014/main" id="{E0A153C4-B0D4-4B7F-BDDC-5DEBF95F5FA1}"/>
               </a:ext>
             </a:extLst>
           </p:cNvPr>
@@ -3091,7 +3091,7 @@
     </p:spTree>
     <p:extLst>
       <p:ext uri="{BB962C8B-B14F-4D97-AF65-F5344CB8AC3E}">
-        <p14:creationId xmlns:p14="http://schemas.microsoft.com/office/powerpoint/2010/main" val="1121640708"/>
+        <p14:creationId xmlns:p14="http://schemas.microsoft.com/office/powerpoint/2010/main" val="1459018086"/>
       </p:ext>
     </p:extLst>
   </p:cSld>
@@ -3292,7 +3292,7 @@
           <p:cNvPr id="19" name="">
             <a:extLst xmlns:a="http://schemas.openxmlformats.org/drawingml/2006/main">
               <a:ext uri="{FF2B5EF4-FFF2-40B4-BE49-F238E27FC236}">
-                <a16:creationId xmlns:a16="http://schemas.microsoft.com/office/drawing/2014/main" id="{60CF57E0-C947-4050-8DEF-18C94F5697B3}"/>
+                <a16:creationId xmlns:a16="http://schemas.microsoft.com/office/drawing/2014/main" id="{45200535-47B1-4ACF-8738-70A170959948}"/>
               </a:ext>
             </a:extLst>
           </p:cNvPr>
@@ -3324,7 +3324,7 @@
           <p:cNvPr id="2" name="">
             <a:extLst xmlns:a="http://schemas.openxmlformats.org/drawingml/2006/main">
               <a:ext uri="{FF2B5EF4-FFF2-40B4-BE49-F238E27FC236}">
-                <a16:creationId xmlns:a16="http://schemas.microsoft.com/office/drawing/2014/main" id="{2E2B13F2-9DAA-410D-8B77-9710B3137B1E}"/>
+                <a16:creationId xmlns:a16="http://schemas.microsoft.com/office/drawing/2014/main" id="{F26A0F8D-197A-4865-A0D2-E81B61952717}"/>
               </a:ext>
             </a:extLst>
           </p:cNvPr>
@@ -3381,7 +3381,7 @@
           <p:cNvPr id="3" name="">
             <a:extLst xmlns:a="http://schemas.openxmlformats.org/drawingml/2006/main">
               <a:ext uri="{FF2B5EF4-FFF2-40B4-BE49-F238E27FC236}">
-                <a16:creationId xmlns:a16="http://schemas.microsoft.com/office/drawing/2014/main" id="{F865548E-BFAB-4716-9D3C-98624DAD83E8}"/>
+                <a16:creationId xmlns:a16="http://schemas.microsoft.com/office/drawing/2014/main" id="{0F80BF94-2632-4157-BCDB-37CC25CA3C19}"/>
               </a:ext>
             </a:extLst>
           </p:cNvPr>
@@ -3413,7 +3413,7 @@
           <p:cNvPr id="4" name="">
             <a:extLst xmlns:a="http://schemas.openxmlformats.org/drawingml/2006/main">
               <a:ext uri="{FF2B5EF4-FFF2-40B4-BE49-F238E27FC236}">
-                <a16:creationId xmlns:a16="http://schemas.microsoft.com/office/drawing/2014/main" id="{9CD0B188-FB87-46BA-8618-837DF1FEDE70}"/>
+                <a16:creationId xmlns:a16="http://schemas.microsoft.com/office/drawing/2014/main" id="{185A2953-7999-4875-AEF1-1FEC7102F720}"/>
               </a:ext>
             </a:extLst>
           </p:cNvPr>
@@ -3470,7 +3470,7 @@
           <p:cNvPr id="5" name="">
             <a:extLst xmlns:a="http://schemas.openxmlformats.org/drawingml/2006/main">
               <a:ext uri="{FF2B5EF4-FFF2-40B4-BE49-F238E27FC236}">
-                <a16:creationId xmlns:a16="http://schemas.microsoft.com/office/drawing/2014/main" id="{7923D37D-5AB8-4CED-B6D4-026FB32E5E3F}"/>
+                <a16:creationId xmlns:a16="http://schemas.microsoft.com/office/drawing/2014/main" id="{EB999CCA-10B6-41A3-9CF1-0339C5B1FD9A}"/>
               </a:ext>
             </a:extLst>
           </p:cNvPr>
@@ -3527,7 +3527,7 @@
           <p:cNvPr id="6" name="">
             <a:extLst xmlns:a="http://schemas.openxmlformats.org/drawingml/2006/main">
               <a:ext uri="{FF2B5EF4-FFF2-40B4-BE49-F238E27FC236}">
-                <a16:creationId xmlns:a16="http://schemas.microsoft.com/office/drawing/2014/main" id="{49488FDA-21F0-48CF-859F-2B61FBB33AB6}"/>
+                <a16:creationId xmlns:a16="http://schemas.microsoft.com/office/drawing/2014/main" id="{FBD3B4EE-135C-4D59-94B7-F35C4F2CB0BB}"/>
               </a:ext>
             </a:extLst>
           </p:cNvPr>
@@ -3584,7 +3584,7 @@
           <p:cNvPr id="7" name="">
             <a:extLst xmlns:a="http://schemas.openxmlformats.org/drawingml/2006/main">
               <a:ext uri="{FF2B5EF4-FFF2-40B4-BE49-F238E27FC236}">
-                <a16:creationId xmlns:a16="http://schemas.microsoft.com/office/drawing/2014/main" id="{061E5495-3A70-49E0-A66B-A805141AB02E}"/>
+                <a16:creationId xmlns:a16="http://schemas.microsoft.com/office/drawing/2014/main" id="{FC1890A2-5806-40B7-8208-6140F768EABC}"/>
               </a:ext>
             </a:extLst>
           </p:cNvPr>
@@ -3616,7 +3616,7 @@
           <p:cNvPr id="8" name="">
             <a:extLst xmlns:a="http://schemas.openxmlformats.org/drawingml/2006/main">
               <a:ext uri="{FF2B5EF4-FFF2-40B4-BE49-F238E27FC236}">
-                <a16:creationId xmlns:a16="http://schemas.microsoft.com/office/drawing/2014/main" id="{32B44DA5-EA97-4755-A53C-4D387FFAAE3E}"/>
+                <a16:creationId xmlns:a16="http://schemas.microsoft.com/office/drawing/2014/main" id="{53D7917A-4569-4202-8EE3-9ACF40892D59}"/>
               </a:ext>
             </a:extLst>
           </p:cNvPr>
@@ -3673,7 +3673,7 @@
           <p:cNvPr id="9" name="">
             <a:extLst xmlns:a="http://schemas.openxmlformats.org/drawingml/2006/main">
               <a:ext uri="{FF2B5EF4-FFF2-40B4-BE49-F238E27FC236}">
-                <a16:creationId xmlns:a16="http://schemas.microsoft.com/office/drawing/2014/main" id="{C55545DE-6B30-47EF-9AF3-8EAA83D93178}"/>
+                <a16:creationId xmlns:a16="http://schemas.microsoft.com/office/drawing/2014/main" id="{133F4D27-9C0B-4D9F-9660-887C6133E4C6}"/>
               </a:ext>
             </a:extLst>
           </p:cNvPr>
@@ -3730,7 +3730,7 @@
           <p:cNvPr id="10" name="">
             <a:extLst xmlns:a="http://schemas.openxmlformats.org/drawingml/2006/main">
               <a:ext uri="{FF2B5EF4-FFF2-40B4-BE49-F238E27FC236}">
-                <a16:creationId xmlns:a16="http://schemas.microsoft.com/office/drawing/2014/main" id="{FD27CAE7-3240-4074-8EC6-10AE6776CDB3}"/>
+                <a16:creationId xmlns:a16="http://schemas.microsoft.com/office/drawing/2014/main" id="{07FB294F-5900-4BEE-A573-4CF27302C975}"/>
               </a:ext>
             </a:extLst>
           </p:cNvPr>
@@ -3787,7 +3787,7 @@
           <p:cNvPr id="11" name="">
             <a:extLst xmlns:a="http://schemas.openxmlformats.org/drawingml/2006/main">
               <a:ext uri="{FF2B5EF4-FFF2-40B4-BE49-F238E27FC236}">
-                <a16:creationId xmlns:a16="http://schemas.microsoft.com/office/drawing/2014/main" id="{FB6B420B-C4A1-4F0E-B7CC-7F364AF1F61B}"/>
+                <a16:creationId xmlns:a16="http://schemas.microsoft.com/office/drawing/2014/main" id="{F740EF3A-8C5B-420A-A589-69EFD5944FFC}"/>
               </a:ext>
             </a:extLst>
           </p:cNvPr>
@@ -3821,7 +3821,7 @@
           <p:cNvPr id="12" name="">
             <a:extLst xmlns:a="http://schemas.openxmlformats.org/drawingml/2006/main">
               <a:ext uri="{FF2B5EF4-FFF2-40B4-BE49-F238E27FC236}">
-                <a16:creationId xmlns:a16="http://schemas.microsoft.com/office/drawing/2014/main" id="{EAD7BC94-CB6D-4989-B74C-4DFCE81E3E83}"/>
+                <a16:creationId xmlns:a16="http://schemas.microsoft.com/office/drawing/2014/main" id="{2C3B27FE-11DD-423C-8C07-A10D29CEB606}"/>
               </a:ext>
             </a:extLst>
           </p:cNvPr>
@@ -3878,7 +3878,7 @@
           <p:cNvPr id="13" name="">
             <a:extLst xmlns:a="http://schemas.openxmlformats.org/drawingml/2006/main">
               <a:ext uri="{FF2B5EF4-FFF2-40B4-BE49-F238E27FC236}">
-                <a16:creationId xmlns:a16="http://schemas.microsoft.com/office/drawing/2014/main" id="{F90FD7DB-C98F-428C-90D3-2410997297C2}"/>
+                <a16:creationId xmlns:a16="http://schemas.microsoft.com/office/drawing/2014/main" id="{6CA0ABBB-69F3-4590-99CD-87D62BB516D9}"/>
               </a:ext>
             </a:extLst>
           </p:cNvPr>
@@ -3935,7 +3935,7 @@
           <p:cNvPr id="14" name="">
             <a:extLst xmlns:a="http://schemas.openxmlformats.org/drawingml/2006/main">
               <a:ext uri="{FF2B5EF4-FFF2-40B4-BE49-F238E27FC236}">
-                <a16:creationId xmlns:a16="http://schemas.microsoft.com/office/drawing/2014/main" id="{450D937F-8650-42D0-BC07-1DE9A48A442D}"/>
+                <a16:creationId xmlns:a16="http://schemas.microsoft.com/office/drawing/2014/main" id="{A99B4608-AB34-40C5-95AA-519D95D28D77}"/>
               </a:ext>
             </a:extLst>
           </p:cNvPr>
@@ -3992,7 +3992,7 @@
           <p:cNvPr id="15" name="">
             <a:extLst xmlns:a="http://schemas.openxmlformats.org/drawingml/2006/main">
               <a:ext uri="{FF2B5EF4-FFF2-40B4-BE49-F238E27FC236}">
-                <a16:creationId xmlns:a16="http://schemas.microsoft.com/office/drawing/2014/main" id="{8CA17BD4-4ABE-439C-94E2-47B1A2B199E8}"/>
+                <a16:creationId xmlns:a16="http://schemas.microsoft.com/office/drawing/2014/main" id="{3E8DD4E8-7F0A-4917-95C4-14B44CA16DF5}"/>
               </a:ext>
             </a:extLst>
           </p:cNvPr>
@@ -4026,7 +4026,7 @@
           <p:cNvPr id="16" name="">
             <a:extLst xmlns:a="http://schemas.openxmlformats.org/drawingml/2006/main">
               <a:ext uri="{FF2B5EF4-FFF2-40B4-BE49-F238E27FC236}">
-                <a16:creationId xmlns:a16="http://schemas.microsoft.com/office/drawing/2014/main" id="{2574A11D-6619-43FF-A298-FD3905D89614}"/>
+                <a16:creationId xmlns:a16="http://schemas.microsoft.com/office/drawing/2014/main" id="{C9D6984F-35E1-4252-9028-519BB9564CC5}"/>
               </a:ext>
             </a:extLst>
           </p:cNvPr>
@@ -4083,7 +4083,7 @@
           <p:cNvPr id="17" name="">
             <a:extLst xmlns:a="http://schemas.openxmlformats.org/drawingml/2006/main">
               <a:ext uri="{FF2B5EF4-FFF2-40B4-BE49-F238E27FC236}">
-                <a16:creationId xmlns:a16="http://schemas.microsoft.com/office/drawing/2014/main" id="{5A10BAF5-939C-416C-B032-10616E099115}"/>
+                <a16:creationId xmlns:a16="http://schemas.microsoft.com/office/drawing/2014/main" id="{329B3F33-8211-4FF9-8FD8-EF00CCBDE334}"/>
               </a:ext>
             </a:extLst>
           </p:cNvPr>
@@ -4140,7 +4140,7 @@
           <p:cNvPr id="18" name="">
             <a:extLst xmlns:a="http://schemas.openxmlformats.org/drawingml/2006/main">
               <a:ext uri="{FF2B5EF4-FFF2-40B4-BE49-F238E27FC236}">
-                <a16:creationId xmlns:a16="http://schemas.microsoft.com/office/drawing/2014/main" id="{AE565F88-9A8F-47E2-A6A5-A236E0719F5D}"/>
+                <a16:creationId xmlns:a16="http://schemas.microsoft.com/office/drawing/2014/main" id="{1DDB266C-FF31-4021-959E-EBAB698592A7}"/>
               </a:ext>
             </a:extLst>
           </p:cNvPr>
@@ -4195,7 +4195,7 @@
     </p:spTree>
     <p:extLst>
       <p:ext uri="{BB962C8B-B14F-4D97-AF65-F5344CB8AC3E}">
-        <p14:creationId xmlns:p14="http://schemas.microsoft.com/office/powerpoint/2010/main" val="661912730"/>
+        <p14:creationId xmlns:p14="http://schemas.microsoft.com/office/powerpoint/2010/main" val="1573683624"/>
       </p:ext>
     </p:extLst>
   </p:cSld>
@@ -4350,7 +4350,7 @@
           <p:cNvPr id="23" name="">
             <a:extLst xmlns:a="http://schemas.openxmlformats.org/drawingml/2006/main">
               <a:ext uri="{FF2B5EF4-FFF2-40B4-BE49-F238E27FC236}">
-                <a16:creationId xmlns:a16="http://schemas.microsoft.com/office/drawing/2014/main" id="{8D8019EC-37E7-48A7-B208-FFC30FDFC40F}"/>
+                <a16:creationId xmlns:a16="http://schemas.microsoft.com/office/drawing/2014/main" id="{FB9AF850-0680-4753-A463-051408675E1F}"/>
               </a:ext>
             </a:extLst>
           </p:cNvPr>
@@ -4382,7 +4382,7 @@
           <p:cNvPr id="2" name="">
             <a:extLst xmlns:a="http://schemas.openxmlformats.org/drawingml/2006/main">
               <a:ext uri="{FF2B5EF4-FFF2-40B4-BE49-F238E27FC236}">
-                <a16:creationId xmlns:a16="http://schemas.microsoft.com/office/drawing/2014/main" id="{D14CBCE6-0408-4A8D-8347-19EABBDE2489}"/>
+                <a16:creationId xmlns:a16="http://schemas.microsoft.com/office/drawing/2014/main" id="{8F4BBD5D-98C8-452C-A1CC-D4A5C7F462EC}"/>
               </a:ext>
             </a:extLst>
           </p:cNvPr>
@@ -4439,7 +4439,7 @@
           <p:cNvPr id="3" name="">
             <a:extLst xmlns:a="http://schemas.openxmlformats.org/drawingml/2006/main">
               <a:ext uri="{FF2B5EF4-FFF2-40B4-BE49-F238E27FC236}">
-                <a16:creationId xmlns:a16="http://schemas.microsoft.com/office/drawing/2014/main" id="{C65C8D71-919B-4D1F-9173-E682C1452AA8}"/>
+                <a16:creationId xmlns:a16="http://schemas.microsoft.com/office/drawing/2014/main" id="{1D10274D-8FDB-4976-9DA7-45CCB22ABFCE}"/>
               </a:ext>
             </a:extLst>
           </p:cNvPr>
@@ -4471,7 +4471,7 @@
           <p:cNvPr id="4" name="">
             <a:extLst xmlns:a="http://schemas.openxmlformats.org/drawingml/2006/main">
               <a:ext uri="{FF2B5EF4-FFF2-40B4-BE49-F238E27FC236}">
-                <a16:creationId xmlns:a16="http://schemas.microsoft.com/office/drawing/2014/main" id="{49FE7EC1-1639-476C-AEAD-2355373688C6}"/>
+                <a16:creationId xmlns:a16="http://schemas.microsoft.com/office/drawing/2014/main" id="{7A472F24-6AFF-48AF-A8FE-9EDD07829FDE}"/>
               </a:ext>
             </a:extLst>
           </p:cNvPr>
@@ -4528,7 +4528,7 @@
           <p:cNvPr id="5" name="">
             <a:extLst xmlns:a="http://schemas.openxmlformats.org/drawingml/2006/main">
               <a:ext uri="{FF2B5EF4-FFF2-40B4-BE49-F238E27FC236}">
-                <a16:creationId xmlns:a16="http://schemas.microsoft.com/office/drawing/2014/main" id="{54B38C52-A915-460D-9F2C-4ACB234023B4}"/>
+                <a16:creationId xmlns:a16="http://schemas.microsoft.com/office/drawing/2014/main" id="{D2E189B3-9738-4E3E-8462-72EB9903C579}"/>
               </a:ext>
             </a:extLst>
           </p:cNvPr>
@@ -4585,7 +4585,7 @@
           <p:cNvPr id="6" name="">
             <a:extLst xmlns:a="http://schemas.openxmlformats.org/drawingml/2006/main">
               <a:ext uri="{FF2B5EF4-FFF2-40B4-BE49-F238E27FC236}">
-                <a16:creationId xmlns:a16="http://schemas.microsoft.com/office/drawing/2014/main" id="{82C7EB6B-1465-467D-B266-BD36146C31DB}"/>
+                <a16:creationId xmlns:a16="http://schemas.microsoft.com/office/drawing/2014/main" id="{0E7DFDAC-6EB4-499D-93AE-59EE090E9C2F}"/>
               </a:ext>
             </a:extLst>
           </p:cNvPr>
@@ -4642,7 +4642,7 @@
           <p:cNvPr id="7" name="">
             <a:extLst xmlns:a="http://schemas.openxmlformats.org/drawingml/2006/main">
               <a:ext uri="{FF2B5EF4-FFF2-40B4-BE49-F238E27FC236}">
-                <a16:creationId xmlns:a16="http://schemas.microsoft.com/office/drawing/2014/main" id="{640D8416-297D-4AFC-B9B9-ECE726F42865}"/>
+                <a16:creationId xmlns:a16="http://schemas.microsoft.com/office/drawing/2014/main" id="{3083B084-7663-48D7-8383-BF7CFD195C27}"/>
               </a:ext>
             </a:extLst>
           </p:cNvPr>
@@ -4674,7 +4674,7 @@
           <p:cNvPr id="8" name="">
             <a:extLst xmlns:a="http://schemas.openxmlformats.org/drawingml/2006/main">
               <a:ext uri="{FF2B5EF4-FFF2-40B4-BE49-F238E27FC236}">
-                <a16:creationId xmlns:a16="http://schemas.microsoft.com/office/drawing/2014/main" id="{A679D0E8-DC96-4629-B654-12924EE671BF}"/>
+                <a16:creationId xmlns:a16="http://schemas.microsoft.com/office/drawing/2014/main" id="{4E101547-16CE-4825-93BE-06DB8EFE866E}"/>
               </a:ext>
             </a:extLst>
           </p:cNvPr>
@@ -4731,7 +4731,7 @@
           <p:cNvPr id="9" name="">
             <a:extLst xmlns:a="http://schemas.openxmlformats.org/drawingml/2006/main">
               <a:ext uri="{FF2B5EF4-FFF2-40B4-BE49-F238E27FC236}">
-                <a16:creationId xmlns:a16="http://schemas.microsoft.com/office/drawing/2014/main" id="{E093FE3E-4CB0-4D9B-8C4C-1003B5C82090}"/>
+                <a16:creationId xmlns:a16="http://schemas.microsoft.com/office/drawing/2014/main" id="{3CA595FB-2E3D-42D4-A17C-D6B843B543C4}"/>
               </a:ext>
             </a:extLst>
           </p:cNvPr>
@@ -4788,7 +4788,7 @@
           <p:cNvPr id="10" name="">
             <a:extLst xmlns:a="http://schemas.openxmlformats.org/drawingml/2006/main">
               <a:ext uri="{FF2B5EF4-FFF2-40B4-BE49-F238E27FC236}">
-                <a16:creationId xmlns:a16="http://schemas.microsoft.com/office/drawing/2014/main" id="{5F4F4357-2C5F-47B9-A8AB-3DC16EDFF6F8}"/>
+                <a16:creationId xmlns:a16="http://schemas.microsoft.com/office/drawing/2014/main" id="{3764DAB9-EC42-47F9-834D-FF308730CCD7}"/>
               </a:ext>
             </a:extLst>
           </p:cNvPr>
@@ -4822,7 +4822,7 @@
           <p:cNvPr id="11" name="">
             <a:extLst xmlns:a="http://schemas.openxmlformats.org/drawingml/2006/main">
               <a:ext uri="{FF2B5EF4-FFF2-40B4-BE49-F238E27FC236}">
-                <a16:creationId xmlns:a16="http://schemas.microsoft.com/office/drawing/2014/main" id="{2881D23C-B3A3-4F99-BBFA-03E5A5273FCF}"/>
+                <a16:creationId xmlns:a16="http://schemas.microsoft.com/office/drawing/2014/main" id="{B0FEAB04-DB29-4011-BAF7-58E5B3578885}"/>
               </a:ext>
             </a:extLst>
           </p:cNvPr>
@@ -4854,7 +4854,7 @@
           <p:cNvPr id="12" name="">
             <a:extLst xmlns:a="http://schemas.openxmlformats.org/drawingml/2006/main">
               <a:ext uri="{FF2B5EF4-FFF2-40B4-BE49-F238E27FC236}">
-                <a16:creationId xmlns:a16="http://schemas.microsoft.com/office/drawing/2014/main" id="{6E9C9613-318F-487B-898F-703647D204D1}"/>
+                <a16:creationId xmlns:a16="http://schemas.microsoft.com/office/drawing/2014/main" id="{7C08BC28-D5A0-44AE-9274-9F5BB0977A24}"/>
               </a:ext>
             </a:extLst>
           </p:cNvPr>
@@ -4911,7 +4911,7 @@
           <p:cNvPr id="13" name="">
             <a:extLst xmlns:a="http://schemas.openxmlformats.org/drawingml/2006/main">
               <a:ext uri="{FF2B5EF4-FFF2-40B4-BE49-F238E27FC236}">
-                <a16:creationId xmlns:a16="http://schemas.microsoft.com/office/drawing/2014/main" id="{4DBE2830-FE61-40BE-8752-298D5FFBA33B}"/>
+                <a16:creationId xmlns:a16="http://schemas.microsoft.com/office/drawing/2014/main" id="{6BD45234-78F3-42CA-869D-AC9FA8487E20}"/>
               </a:ext>
             </a:extLst>
           </p:cNvPr>
@@ -4968,7 +4968,7 @@
           <p:cNvPr id="14" name="">
             <a:extLst xmlns:a="http://schemas.openxmlformats.org/drawingml/2006/main">
               <a:ext uri="{FF2B5EF4-FFF2-40B4-BE49-F238E27FC236}">
-                <a16:creationId xmlns:a16="http://schemas.microsoft.com/office/drawing/2014/main" id="{FB62D470-C61C-4D1F-957F-BD7694551FBB}"/>
+                <a16:creationId xmlns:a16="http://schemas.microsoft.com/office/drawing/2014/main" id="{2961886D-0EB4-4581-97CE-A057860A3AA7}"/>
               </a:ext>
             </a:extLst>
           </p:cNvPr>
@@ -5002,7 +5002,7 @@
           <p:cNvPr id="15" name="">
             <a:extLst xmlns:a="http://schemas.openxmlformats.org/drawingml/2006/main">
               <a:ext uri="{FF2B5EF4-FFF2-40B4-BE49-F238E27FC236}">
-                <a16:creationId xmlns:a16="http://schemas.microsoft.com/office/drawing/2014/main" id="{59664016-4851-4F7F-8650-15BDC53B978B}"/>
+                <a16:creationId xmlns:a16="http://schemas.microsoft.com/office/drawing/2014/main" id="{79B658FB-33D7-40BE-BE4A-A0415C9C2D1B}"/>
               </a:ext>
             </a:extLst>
           </p:cNvPr>
@@ -5034,7 +5034,7 @@
           <p:cNvPr id="16" name="">
             <a:extLst xmlns:a="http://schemas.openxmlformats.org/drawingml/2006/main">
               <a:ext uri="{FF2B5EF4-FFF2-40B4-BE49-F238E27FC236}">
-                <a16:creationId xmlns:a16="http://schemas.microsoft.com/office/drawing/2014/main" id="{31FC1492-0C19-4509-80F5-CE0BD8884602}"/>
+                <a16:creationId xmlns:a16="http://schemas.microsoft.com/office/drawing/2014/main" id="{57540297-7E25-4025-8BB5-A6C37A61B0B0}"/>
               </a:ext>
             </a:extLst>
           </p:cNvPr>
@@ -5091,7 +5091,7 @@
           <p:cNvPr id="17" name="">
             <a:extLst xmlns:a="http://schemas.openxmlformats.org/drawingml/2006/main">
               <a:ext uri="{FF2B5EF4-FFF2-40B4-BE49-F238E27FC236}">
-                <a16:creationId xmlns:a16="http://schemas.microsoft.com/office/drawing/2014/main" id="{647D4A2F-E712-4EBB-B78F-82089A69A105}"/>
+                <a16:creationId xmlns:a16="http://schemas.microsoft.com/office/drawing/2014/main" id="{465241E1-0E72-4B76-A83F-5A6DB5430E8D}"/>
               </a:ext>
             </a:extLst>
           </p:cNvPr>
@@ -5148,7 +5148,7 @@
           <p:cNvPr id="18" name="">
             <a:extLst xmlns:a="http://schemas.openxmlformats.org/drawingml/2006/main">
               <a:ext uri="{FF2B5EF4-FFF2-40B4-BE49-F238E27FC236}">
-                <a16:creationId xmlns:a16="http://schemas.microsoft.com/office/drawing/2014/main" id="{4E454978-40AC-42B5-86D9-905067B2A549}"/>
+                <a16:creationId xmlns:a16="http://schemas.microsoft.com/office/drawing/2014/main" id="{3E377D80-A249-41CF-84C0-EB6407A05660}"/>
               </a:ext>
             </a:extLst>
           </p:cNvPr>
@@ -5182,7 +5182,7 @@
           <p:cNvPr id="19" name="">
             <a:extLst xmlns:a="http://schemas.openxmlformats.org/drawingml/2006/main">
               <a:ext uri="{FF2B5EF4-FFF2-40B4-BE49-F238E27FC236}">
-                <a16:creationId xmlns:a16="http://schemas.microsoft.com/office/drawing/2014/main" id="{8D7721E2-4F5A-46B5-BB59-3BB577F5E265}"/>
+                <a16:creationId xmlns:a16="http://schemas.microsoft.com/office/drawing/2014/main" id="{474881FD-81D5-4C07-B1F1-41317B121441}"/>
               </a:ext>
             </a:extLst>
           </p:cNvPr>
@@ -5214,7 +5214,7 @@
           <p:cNvPr id="20" name="">
             <a:extLst xmlns:a="http://schemas.openxmlformats.org/drawingml/2006/main">
               <a:ext uri="{FF2B5EF4-FFF2-40B4-BE49-F238E27FC236}">
-                <a16:creationId xmlns:a16="http://schemas.microsoft.com/office/drawing/2014/main" id="{7F9F9CDC-7BF6-4668-B6DA-C83B54CA8AC1}"/>
+                <a16:creationId xmlns:a16="http://schemas.microsoft.com/office/drawing/2014/main" id="{C4307E30-2B12-44E4-AF0F-FA42F066A6EE}"/>
               </a:ext>
             </a:extLst>
           </p:cNvPr>
@@ -5271,7 +5271,7 @@
           <p:cNvPr id="21" name="">
             <a:extLst xmlns:a="http://schemas.openxmlformats.org/drawingml/2006/main">
               <a:ext uri="{FF2B5EF4-FFF2-40B4-BE49-F238E27FC236}">
-                <a16:creationId xmlns:a16="http://schemas.microsoft.com/office/drawing/2014/main" id="{ABCE506E-95BF-4AC4-8C6E-3398F868A101}"/>
+                <a16:creationId xmlns:a16="http://schemas.microsoft.com/office/drawing/2014/main" id="{E4AB7829-8C1D-40C2-85C2-80A214AC9464}"/>
               </a:ext>
             </a:extLst>
           </p:cNvPr>
@@ -5328,7 +5328,7 @@
           <p:cNvPr id="22" name="">
             <a:extLst xmlns:a="http://schemas.openxmlformats.org/drawingml/2006/main">
               <a:ext uri="{FF2B5EF4-FFF2-40B4-BE49-F238E27FC236}">
-                <a16:creationId xmlns:a16="http://schemas.microsoft.com/office/drawing/2014/main" id="{E377E2F5-7235-46D4-B37D-6BF9E8460E50}"/>
+                <a16:creationId xmlns:a16="http://schemas.microsoft.com/office/drawing/2014/main" id="{BA84AB40-A0A1-47F2-BEE9-6BC9F679A90A}"/>
               </a:ext>
             </a:extLst>
           </p:cNvPr>
@@ -5383,7 +5383,7 @@
     </p:spTree>
     <p:extLst>
       <p:ext uri="{BB962C8B-B14F-4D97-AF65-F5344CB8AC3E}">
-        <p14:creationId xmlns:p14="http://schemas.microsoft.com/office/powerpoint/2010/main" val="910059686"/>
+        <p14:creationId xmlns:p14="http://schemas.microsoft.com/office/powerpoint/2010/main" val="525540136"/>
       </p:ext>
     </p:extLst>
   </p:cSld>
@@ -5584,7 +5584,7 @@
           <p:cNvPr id="23" name="">
             <a:extLst xmlns:a="http://schemas.openxmlformats.org/drawingml/2006/main">
               <a:ext uri="{FF2B5EF4-FFF2-40B4-BE49-F238E27FC236}">
-                <a16:creationId xmlns:a16="http://schemas.microsoft.com/office/drawing/2014/main" id="{E77E2F34-444E-471D-9614-F7242F15B1A1}"/>
+                <a16:creationId xmlns:a16="http://schemas.microsoft.com/office/drawing/2014/main" id="{33FB3C54-470F-40D0-BB80-BBA6E91F923B}"/>
               </a:ext>
             </a:extLst>
           </p:cNvPr>
@@ -5616,7 +5616,7 @@
           <p:cNvPr id="2" name="">
             <a:extLst xmlns:a="http://schemas.openxmlformats.org/drawingml/2006/main">
               <a:ext uri="{FF2B5EF4-FFF2-40B4-BE49-F238E27FC236}">
-                <a16:creationId xmlns:a16="http://schemas.microsoft.com/office/drawing/2014/main" id="{08220CEC-3445-496C-97A8-54FA165072ED}"/>
+                <a16:creationId xmlns:a16="http://schemas.microsoft.com/office/drawing/2014/main" id="{BE3DE1D7-B73A-4B52-9656-85B2FCBEF0CD}"/>
               </a:ext>
             </a:extLst>
           </p:cNvPr>
@@ -5673,7 +5673,7 @@
           <p:cNvPr id="3" name="">
             <a:extLst xmlns:a="http://schemas.openxmlformats.org/drawingml/2006/main">
               <a:ext uri="{FF2B5EF4-FFF2-40B4-BE49-F238E27FC236}">
-                <a16:creationId xmlns:a16="http://schemas.microsoft.com/office/drawing/2014/main" id="{86A1E0CF-033E-442F-B9A4-BBC43216B31A}"/>
+                <a16:creationId xmlns:a16="http://schemas.microsoft.com/office/drawing/2014/main" id="{7166BC37-D6E8-4577-ACB4-6005A468F0F2}"/>
               </a:ext>
             </a:extLst>
           </p:cNvPr>
@@ -5705,7 +5705,7 @@
           <p:cNvPr id="4" name="">
             <a:extLst xmlns:a="http://schemas.openxmlformats.org/drawingml/2006/main">
               <a:ext uri="{FF2B5EF4-FFF2-40B4-BE49-F238E27FC236}">
-                <a16:creationId xmlns:a16="http://schemas.microsoft.com/office/drawing/2014/main" id="{9E19C340-27FF-481D-9E9A-607B2C762949}"/>
+                <a16:creationId xmlns:a16="http://schemas.microsoft.com/office/drawing/2014/main" id="{2EADC061-61C2-4B86-82B8-A55E638A6291}"/>
               </a:ext>
             </a:extLst>
           </p:cNvPr>
@@ -5762,7 +5762,7 @@
           <p:cNvPr id="5" name="">
             <a:extLst xmlns:a="http://schemas.openxmlformats.org/drawingml/2006/main">
               <a:ext uri="{FF2B5EF4-FFF2-40B4-BE49-F238E27FC236}">
-                <a16:creationId xmlns:a16="http://schemas.microsoft.com/office/drawing/2014/main" id="{1DB64C42-B0A9-43BE-92DD-F513D715A5EA}"/>
+                <a16:creationId xmlns:a16="http://schemas.microsoft.com/office/drawing/2014/main" id="{2A227A5D-F3C8-4176-95AC-003F4BC5FDF4}"/>
               </a:ext>
             </a:extLst>
           </p:cNvPr>
@@ -5819,7 +5819,7 @@
           <p:cNvPr id="6" name="">
             <a:extLst xmlns:a="http://schemas.openxmlformats.org/drawingml/2006/main">
               <a:ext uri="{FF2B5EF4-FFF2-40B4-BE49-F238E27FC236}">
-                <a16:creationId xmlns:a16="http://schemas.microsoft.com/office/drawing/2014/main" id="{45FD25AC-2EB2-462E-8285-9E92BE86BA5C}"/>
+                <a16:creationId xmlns:a16="http://schemas.microsoft.com/office/drawing/2014/main" id="{406AB903-07AF-4C30-8B7E-84C82A9BA690}"/>
               </a:ext>
             </a:extLst>
           </p:cNvPr>
@@ -5876,7 +5876,7 @@
           <p:cNvPr id="7" name="">
             <a:extLst xmlns:a="http://schemas.openxmlformats.org/drawingml/2006/main">
               <a:ext uri="{FF2B5EF4-FFF2-40B4-BE49-F238E27FC236}">
-                <a16:creationId xmlns:a16="http://schemas.microsoft.com/office/drawing/2014/main" id="{E97BC9C1-EF17-44D7-A8FE-A121A2AA8F0B}"/>
+                <a16:creationId xmlns:a16="http://schemas.microsoft.com/office/drawing/2014/main" id="{7A9BD570-52EC-4273-967E-CF3F85856121}"/>
               </a:ext>
             </a:extLst>
           </p:cNvPr>
@@ -5908,7 +5908,7 @@
           <p:cNvPr id="8" name="">
             <a:extLst xmlns:a="http://schemas.openxmlformats.org/drawingml/2006/main">
               <a:ext uri="{FF2B5EF4-FFF2-40B4-BE49-F238E27FC236}">
-                <a16:creationId xmlns:a16="http://schemas.microsoft.com/office/drawing/2014/main" id="{12091F97-AFDA-451E-AF8A-A8F2FCABACF4}"/>
+                <a16:creationId xmlns:a16="http://schemas.microsoft.com/office/drawing/2014/main" id="{79E35EE2-D75F-464F-9E54-851A102277DD}"/>
               </a:ext>
             </a:extLst>
           </p:cNvPr>
@@ -5965,7 +5965,7 @@
           <p:cNvPr id="9" name="">
             <a:extLst xmlns:a="http://schemas.openxmlformats.org/drawingml/2006/main">
               <a:ext uri="{FF2B5EF4-FFF2-40B4-BE49-F238E27FC236}">
-                <a16:creationId xmlns:a16="http://schemas.microsoft.com/office/drawing/2014/main" id="{8E7F6A95-B50E-4199-BBE9-A43DD8180E3D}"/>
+                <a16:creationId xmlns:a16="http://schemas.microsoft.com/office/drawing/2014/main" id="{C89D5516-6667-4C56-8EB4-BEA9FCBDB475}"/>
               </a:ext>
             </a:extLst>
           </p:cNvPr>
@@ -6022,7 +6022,7 @@
           <p:cNvPr id="10" name="">
             <a:extLst xmlns:a="http://schemas.openxmlformats.org/drawingml/2006/main">
               <a:ext uri="{FF2B5EF4-FFF2-40B4-BE49-F238E27FC236}">
-                <a16:creationId xmlns:a16="http://schemas.microsoft.com/office/drawing/2014/main" id="{BADD63BD-EE2A-4C9C-B7D8-E5E1DC2E495A}"/>
+                <a16:creationId xmlns:a16="http://schemas.microsoft.com/office/drawing/2014/main" id="{74FF5390-E2C8-4C15-B57D-C97D6FF4E4E4}"/>
               </a:ext>
             </a:extLst>
           </p:cNvPr>
@@ -6056,7 +6056,7 @@
           <p:cNvPr id="11" name="">
             <a:extLst xmlns:a="http://schemas.openxmlformats.org/drawingml/2006/main">
               <a:ext uri="{FF2B5EF4-FFF2-40B4-BE49-F238E27FC236}">
-                <a16:creationId xmlns:a16="http://schemas.microsoft.com/office/drawing/2014/main" id="{ED1C533C-3513-4FA1-8602-430D89E23926}"/>
+                <a16:creationId xmlns:a16="http://schemas.microsoft.com/office/drawing/2014/main" id="{BE5D0FAD-ECB8-41EB-A88E-6D3B77B55524}"/>
               </a:ext>
             </a:extLst>
           </p:cNvPr>
@@ -6088,7 +6088,7 @@
           <p:cNvPr id="12" name="">
             <a:extLst xmlns:a="http://schemas.openxmlformats.org/drawingml/2006/main">
               <a:ext uri="{FF2B5EF4-FFF2-40B4-BE49-F238E27FC236}">
-                <a16:creationId xmlns:a16="http://schemas.microsoft.com/office/drawing/2014/main" id="{66F22356-B778-4099-A6FF-4D272EE05DE3}"/>
+                <a16:creationId xmlns:a16="http://schemas.microsoft.com/office/drawing/2014/main" id="{41B2B164-DA98-4CC9-9A98-26FF0BD69884}"/>
               </a:ext>
             </a:extLst>
           </p:cNvPr>
@@ -6145,7 +6145,7 @@
           <p:cNvPr id="13" name="">
             <a:extLst xmlns:a="http://schemas.openxmlformats.org/drawingml/2006/main">
               <a:ext uri="{FF2B5EF4-FFF2-40B4-BE49-F238E27FC236}">
-                <a16:creationId xmlns:a16="http://schemas.microsoft.com/office/drawing/2014/main" id="{E21567EB-2CB8-4C23-B0F3-96F22EFC0BE9}"/>
+                <a16:creationId xmlns:a16="http://schemas.microsoft.com/office/drawing/2014/main" id="{43DC0084-C3F6-4AC4-ACC2-70A6B9F43854}"/>
               </a:ext>
             </a:extLst>
           </p:cNvPr>
@@ -6202,7 +6202,7 @@
           <p:cNvPr id="14" name="">
             <a:extLst xmlns:a="http://schemas.openxmlformats.org/drawingml/2006/main">
               <a:ext uri="{FF2B5EF4-FFF2-40B4-BE49-F238E27FC236}">
-                <a16:creationId xmlns:a16="http://schemas.microsoft.com/office/drawing/2014/main" id="{47C514B1-5CEB-4903-8931-CD17DF9300F3}"/>
+                <a16:creationId xmlns:a16="http://schemas.microsoft.com/office/drawing/2014/main" id="{53C4A369-F175-499C-8571-9A9ABFBD65FF}"/>
               </a:ext>
             </a:extLst>
           </p:cNvPr>
@@ -6236,7 +6236,7 @@
           <p:cNvPr id="15" name="">
             <a:extLst xmlns:a="http://schemas.openxmlformats.org/drawingml/2006/main">
               <a:ext uri="{FF2B5EF4-FFF2-40B4-BE49-F238E27FC236}">
-                <a16:creationId xmlns:a16="http://schemas.microsoft.com/office/drawing/2014/main" id="{38A4CDA3-6A57-44B3-AC20-FBE289BE0261}"/>
+                <a16:creationId xmlns:a16="http://schemas.microsoft.com/office/drawing/2014/main" id="{F3A72812-FC51-4E22-A289-F48B6BFFE1DD}"/>
               </a:ext>
             </a:extLst>
           </p:cNvPr>
@@ -6268,7 +6268,7 @@
           <p:cNvPr id="16" name="">
             <a:extLst xmlns:a="http://schemas.openxmlformats.org/drawingml/2006/main">
               <a:ext uri="{FF2B5EF4-FFF2-40B4-BE49-F238E27FC236}">
-                <a16:creationId xmlns:a16="http://schemas.microsoft.com/office/drawing/2014/main" id="{BA2E6313-291B-44C5-81EC-76EEBA524C18}"/>
+                <a16:creationId xmlns:a16="http://schemas.microsoft.com/office/drawing/2014/main" id="{6693ED1B-356E-45FA-BBED-C6F7DC18BF23}"/>
               </a:ext>
             </a:extLst>
           </p:cNvPr>
@@ -6325,7 +6325,7 @@
           <p:cNvPr id="17" name="">
             <a:extLst xmlns:a="http://schemas.openxmlformats.org/drawingml/2006/main">
               <a:ext uri="{FF2B5EF4-FFF2-40B4-BE49-F238E27FC236}">
-                <a16:creationId xmlns:a16="http://schemas.microsoft.com/office/drawing/2014/main" id="{95360A06-0E99-46BF-AAE4-F9079BFE9113}"/>
+                <a16:creationId xmlns:a16="http://schemas.microsoft.com/office/drawing/2014/main" id="{0A9AD0D4-F299-45E5-9D5F-B8E885CBD121}"/>
               </a:ext>
             </a:extLst>
           </p:cNvPr>
@@ -6382,7 +6382,7 @@
           <p:cNvPr id="18" name="">
             <a:extLst xmlns:a="http://schemas.openxmlformats.org/drawingml/2006/main">
               <a:ext uri="{FF2B5EF4-FFF2-40B4-BE49-F238E27FC236}">
-                <a16:creationId xmlns:a16="http://schemas.microsoft.com/office/drawing/2014/main" id="{507D19B9-6CF6-4169-9ABD-2237E7DA396D}"/>
+                <a16:creationId xmlns:a16="http://schemas.microsoft.com/office/drawing/2014/main" id="{45A31785-71C5-43B9-8FF6-2958ED25748D}"/>
               </a:ext>
             </a:extLst>
           </p:cNvPr>
@@ -6416,7 +6416,7 @@
           <p:cNvPr id="19" name="">
             <a:extLst xmlns:a="http://schemas.openxmlformats.org/drawingml/2006/main">
               <a:ext uri="{FF2B5EF4-FFF2-40B4-BE49-F238E27FC236}">
-                <a16:creationId xmlns:a16="http://schemas.microsoft.com/office/drawing/2014/main" id="{3DCBE9B3-5005-4FDF-B2C9-CDA39E5FCFB1}"/>
+                <a16:creationId xmlns:a16="http://schemas.microsoft.com/office/drawing/2014/main" id="{03C4AC6A-6B93-40FB-AFD1-844A42076EB0}"/>
               </a:ext>
             </a:extLst>
           </p:cNvPr>
@@ -6448,7 +6448,7 @@
           <p:cNvPr id="20" name="">
             <a:extLst xmlns:a="http://schemas.openxmlformats.org/drawingml/2006/main">
               <a:ext uri="{FF2B5EF4-FFF2-40B4-BE49-F238E27FC236}">
-                <a16:creationId xmlns:a16="http://schemas.microsoft.com/office/drawing/2014/main" id="{02924E5F-1CA4-4CD8-8E3B-8840800470AD}"/>
+                <a16:creationId xmlns:a16="http://schemas.microsoft.com/office/drawing/2014/main" id="{238894A4-913B-4430-9425-88754925AEC8}"/>
               </a:ext>
             </a:extLst>
           </p:cNvPr>
@@ -6505,7 +6505,7 @@
           <p:cNvPr id="21" name="">
             <a:extLst xmlns:a="http://schemas.openxmlformats.org/drawingml/2006/main">
               <a:ext uri="{FF2B5EF4-FFF2-40B4-BE49-F238E27FC236}">
-                <a16:creationId xmlns:a16="http://schemas.microsoft.com/office/drawing/2014/main" id="{B1941EFD-993D-40F0-8233-D51F2D30659D}"/>
+                <a16:creationId xmlns:a16="http://schemas.microsoft.com/office/drawing/2014/main" id="{BC5DD9ED-F2CF-4257-A23A-CB1FF79ADC7A}"/>
               </a:ext>
             </a:extLst>
           </p:cNvPr>
@@ -6562,7 +6562,7 @@
           <p:cNvPr id="22" name="">
             <a:extLst xmlns:a="http://schemas.openxmlformats.org/drawingml/2006/main">
               <a:ext uri="{FF2B5EF4-FFF2-40B4-BE49-F238E27FC236}">
-                <a16:creationId xmlns:a16="http://schemas.microsoft.com/office/drawing/2014/main" id="{363BF434-D7D1-49C3-80B2-B8BCFF222DA6}"/>
+                <a16:creationId xmlns:a16="http://schemas.microsoft.com/office/drawing/2014/main" id="{AB2D67CC-D9A0-4B21-8461-E64D6E3F50BA}"/>
               </a:ext>
             </a:extLst>
           </p:cNvPr>
@@ -6617,7 +6617,7 @@
     </p:spTree>
     <p:extLst>
       <p:ext uri="{BB962C8B-B14F-4D97-AF65-F5344CB8AC3E}">
-        <p14:creationId xmlns:p14="http://schemas.microsoft.com/office/powerpoint/2010/main" val="1986854247"/>
+        <p14:creationId xmlns:p14="http://schemas.microsoft.com/office/powerpoint/2010/main" val="1558138796"/>
       </p:ext>
     </p:extLst>
   </p:cSld>
@@ -6818,7 +6818,7 @@
           <p:cNvPr id="16" name="">
             <a:extLst xmlns:a="http://schemas.openxmlformats.org/drawingml/2006/main">
               <a:ext uri="{FF2B5EF4-FFF2-40B4-BE49-F238E27FC236}">
-                <a16:creationId xmlns:a16="http://schemas.microsoft.com/office/drawing/2014/main" id="{CF9B1167-306C-42A0-BB6E-BFA4D8103975}"/>
+                <a16:creationId xmlns:a16="http://schemas.microsoft.com/office/drawing/2014/main" id="{7A995F15-5E97-4342-A666-5FD5FCF55461}"/>
               </a:ext>
             </a:extLst>
           </p:cNvPr>
@@ -6850,7 +6850,7 @@
           <p:cNvPr id="2" name="">
             <a:extLst xmlns:a="http://schemas.openxmlformats.org/drawingml/2006/main">
               <a:ext uri="{FF2B5EF4-FFF2-40B4-BE49-F238E27FC236}">
-                <a16:creationId xmlns:a16="http://schemas.microsoft.com/office/drawing/2014/main" id="{6D29FB81-3B74-4692-A074-F4526D8F765D}"/>
+                <a16:creationId xmlns:a16="http://schemas.microsoft.com/office/drawing/2014/main" id="{6471A79F-A2CD-4339-8920-E0E99B003B95}"/>
               </a:ext>
             </a:extLst>
           </p:cNvPr>
@@ -6907,7 +6907,7 @@
           <p:cNvPr id="3" name="">
             <a:extLst xmlns:a="http://schemas.openxmlformats.org/drawingml/2006/main">
               <a:ext uri="{FF2B5EF4-FFF2-40B4-BE49-F238E27FC236}">
-                <a16:creationId xmlns:a16="http://schemas.microsoft.com/office/drawing/2014/main" id="{3F147D75-A532-4B96-9CEE-7F3564F6AB20}"/>
+                <a16:creationId xmlns:a16="http://schemas.microsoft.com/office/drawing/2014/main" id="{C0ADDA4A-9488-486F-8782-5D41B950010C}"/>
               </a:ext>
             </a:extLst>
           </p:cNvPr>
@@ -6939,7 +6939,7 @@
           <p:cNvPr id="4" name="">
             <a:extLst xmlns:a="http://schemas.openxmlformats.org/drawingml/2006/main">
               <a:ext uri="{FF2B5EF4-FFF2-40B4-BE49-F238E27FC236}">
-                <a16:creationId xmlns:a16="http://schemas.microsoft.com/office/drawing/2014/main" id="{F2CD39DF-A43D-4087-B245-192C48866551}"/>
+                <a16:creationId xmlns:a16="http://schemas.microsoft.com/office/drawing/2014/main" id="{9B208FF2-FF0A-4611-80F0-D876D0C81FEE}"/>
               </a:ext>
             </a:extLst>
           </p:cNvPr>
@@ -6996,7 +6996,7 @@
           <p:cNvPr id="5" name="">
             <a:extLst xmlns:a="http://schemas.openxmlformats.org/drawingml/2006/main">
               <a:ext uri="{FF2B5EF4-FFF2-40B4-BE49-F238E27FC236}">
-                <a16:creationId xmlns:a16="http://schemas.microsoft.com/office/drawing/2014/main" id="{7095E368-DD1E-43DB-A41E-F532E0BA564F}"/>
+                <a16:creationId xmlns:a16="http://schemas.microsoft.com/office/drawing/2014/main" id="{21D5B61D-5290-476E-A2EA-0EABD3E0B4B6}"/>
               </a:ext>
             </a:extLst>
           </p:cNvPr>
@@ -7053,7 +7053,7 @@
           <p:cNvPr id="6" name="">
             <a:extLst xmlns:a="http://schemas.openxmlformats.org/drawingml/2006/main">
               <a:ext uri="{FF2B5EF4-FFF2-40B4-BE49-F238E27FC236}">
-                <a16:creationId xmlns:a16="http://schemas.microsoft.com/office/drawing/2014/main" id="{052CBFF6-671F-4A8E-8637-F108E2CBA6D4}"/>
+                <a16:creationId xmlns:a16="http://schemas.microsoft.com/office/drawing/2014/main" id="{DC2139EF-088D-402F-8B6C-FFE8BEFC5F8C}"/>
               </a:ext>
             </a:extLst>
           </p:cNvPr>
@@ -7110,7 +7110,7 @@
           <p:cNvPr id="7" name="">
             <a:extLst xmlns:a="http://schemas.openxmlformats.org/drawingml/2006/main">
               <a:ext uri="{FF2B5EF4-FFF2-40B4-BE49-F238E27FC236}">
-                <a16:creationId xmlns:a16="http://schemas.microsoft.com/office/drawing/2014/main" id="{8D4ECD5A-9A35-4D2B-8DF5-A81EF64E1B03}"/>
+                <a16:creationId xmlns:a16="http://schemas.microsoft.com/office/drawing/2014/main" id="{CFAADC8D-73D8-4224-A10B-3F7EDBA454FC}"/>
               </a:ext>
             </a:extLst>
           </p:cNvPr>
@@ -7142,7 +7142,7 @@
           <p:cNvPr id="8" name="">
             <a:extLst xmlns:a="http://schemas.openxmlformats.org/drawingml/2006/main">
               <a:ext uri="{FF2B5EF4-FFF2-40B4-BE49-F238E27FC236}">
-                <a16:creationId xmlns:a16="http://schemas.microsoft.com/office/drawing/2014/main" id="{C146DF65-2291-4265-B320-8974BD8FE1C3}"/>
+                <a16:creationId xmlns:a16="http://schemas.microsoft.com/office/drawing/2014/main" id="{646A6B6C-E1A6-49A8-9B14-5B35D6E32E29}"/>
               </a:ext>
             </a:extLst>
           </p:cNvPr>
@@ -7199,7 +7199,7 @@
           <p:cNvPr id="9" name="">
             <a:extLst xmlns:a="http://schemas.openxmlformats.org/drawingml/2006/main">
               <a:ext uri="{FF2B5EF4-FFF2-40B4-BE49-F238E27FC236}">
-                <a16:creationId xmlns:a16="http://schemas.microsoft.com/office/drawing/2014/main" id="{0A0FC5F5-425C-4259-A14D-A3AD37957707}"/>
+                <a16:creationId xmlns:a16="http://schemas.microsoft.com/office/drawing/2014/main" id="{4024041B-3FCD-4A28-9310-2777361A0903}"/>
               </a:ext>
             </a:extLst>
           </p:cNvPr>
@@ -7256,7 +7256,7 @@
           <p:cNvPr id="10" name="">
             <a:extLst xmlns:a="http://schemas.openxmlformats.org/drawingml/2006/main">
               <a:ext uri="{FF2B5EF4-FFF2-40B4-BE49-F238E27FC236}">
-                <a16:creationId xmlns:a16="http://schemas.microsoft.com/office/drawing/2014/main" id="{E16B0514-51F8-40FF-9D9A-6CE1B69D25EB}"/>
+                <a16:creationId xmlns:a16="http://schemas.microsoft.com/office/drawing/2014/main" id="{A12D0063-8F61-4D7C-9B6C-829E4376712B}"/>
               </a:ext>
             </a:extLst>
           </p:cNvPr>
@@ -7313,7 +7313,7 @@
           <p:cNvPr id="11" name="">
             <a:extLst xmlns:a="http://schemas.openxmlformats.org/drawingml/2006/main">
               <a:ext uri="{FF2B5EF4-FFF2-40B4-BE49-F238E27FC236}">
-                <a16:creationId xmlns:a16="http://schemas.microsoft.com/office/drawing/2014/main" id="{732C6284-FAB4-43EA-9A79-8A1631A15B2D}"/>
+                <a16:creationId xmlns:a16="http://schemas.microsoft.com/office/drawing/2014/main" id="{332C199B-586E-4419-85D6-A7F174EDEC36}"/>
               </a:ext>
             </a:extLst>
           </p:cNvPr>
@@ -7345,7 +7345,7 @@
           <p:cNvPr id="12" name="">
             <a:extLst xmlns:a="http://schemas.openxmlformats.org/drawingml/2006/main">
               <a:ext uri="{FF2B5EF4-FFF2-40B4-BE49-F238E27FC236}">
-                <a16:creationId xmlns:a16="http://schemas.microsoft.com/office/drawing/2014/main" id="{70619C37-510D-41CE-B343-6C5ED11EA9F0}"/>
+                <a16:creationId xmlns:a16="http://schemas.microsoft.com/office/drawing/2014/main" id="{7156CC04-1EE4-45B2-9B50-5D835D309751}"/>
               </a:ext>
             </a:extLst>
           </p:cNvPr>
@@ -7402,7 +7402,7 @@
           <p:cNvPr id="13" name="">
             <a:extLst xmlns:a="http://schemas.openxmlformats.org/drawingml/2006/main">
               <a:ext uri="{FF2B5EF4-FFF2-40B4-BE49-F238E27FC236}">
-                <a16:creationId xmlns:a16="http://schemas.microsoft.com/office/drawing/2014/main" id="{D0483DA4-9B13-41B4-A58F-7AA5671A9159}"/>
+                <a16:creationId xmlns:a16="http://schemas.microsoft.com/office/drawing/2014/main" id="{F682686C-1280-4014-BD5D-75D8AA27DE54}"/>
               </a:ext>
             </a:extLst>
           </p:cNvPr>
@@ -7459,7 +7459,7 @@
           <p:cNvPr id="14" name="">
             <a:extLst xmlns:a="http://schemas.openxmlformats.org/drawingml/2006/main">
               <a:ext uri="{FF2B5EF4-FFF2-40B4-BE49-F238E27FC236}">
-                <a16:creationId xmlns:a16="http://schemas.microsoft.com/office/drawing/2014/main" id="{EC4E99E7-2B6A-47C3-8780-B8D5068D6520}"/>
+                <a16:creationId xmlns:a16="http://schemas.microsoft.com/office/drawing/2014/main" id="{98587805-7D88-4729-A021-D4277774DFA8}"/>
               </a:ext>
             </a:extLst>
           </p:cNvPr>
@@ -7516,7 +7516,7 @@
           <p:cNvPr id="15" name="">
             <a:extLst xmlns:a="http://schemas.openxmlformats.org/drawingml/2006/main">
               <a:ext uri="{FF2B5EF4-FFF2-40B4-BE49-F238E27FC236}">
-                <a16:creationId xmlns:a16="http://schemas.microsoft.com/office/drawing/2014/main" id="{BE846A9C-01E1-49C0-AF0E-9902FB7C6EFC}"/>
+                <a16:creationId xmlns:a16="http://schemas.microsoft.com/office/drawing/2014/main" id="{CC6704BF-697C-495E-A3D1-5B9FE0EA0B62}"/>
               </a:ext>
             </a:extLst>
           </p:cNvPr>
@@ -7571,7 +7571,7 @@
     </p:spTree>
     <p:extLst>
       <p:ext uri="{BB962C8B-B14F-4D97-AF65-F5344CB8AC3E}">
-        <p14:creationId xmlns:p14="http://schemas.microsoft.com/office/powerpoint/2010/main" val="1714724832"/>
+        <p14:creationId xmlns:p14="http://schemas.microsoft.com/office/powerpoint/2010/main" val="1862963667"/>
       </p:ext>
     </p:extLst>
   </p:cSld>
@@ -7772,7 +7772,7 @@
           <p:cNvPr id="23" name="">
             <a:extLst xmlns:a="http://schemas.openxmlformats.org/drawingml/2006/main">
               <a:ext uri="{FF2B5EF4-FFF2-40B4-BE49-F238E27FC236}">
-                <a16:creationId xmlns:a16="http://schemas.microsoft.com/office/drawing/2014/main" id="{36618A24-2D3E-4CC2-96A3-CCD398506D67}"/>
+                <a16:creationId xmlns:a16="http://schemas.microsoft.com/office/drawing/2014/main" id="{F0950686-61DE-4931-BB18-A5AC5CC3A61C}"/>
               </a:ext>
             </a:extLst>
           </p:cNvPr>
@@ -7804,7 +7804,7 @@
           <p:cNvPr id="2" name="">
             <a:extLst xmlns:a="http://schemas.openxmlformats.org/drawingml/2006/main">
               <a:ext uri="{FF2B5EF4-FFF2-40B4-BE49-F238E27FC236}">
-                <a16:creationId xmlns:a16="http://schemas.microsoft.com/office/drawing/2014/main" id="{5A2267F8-3C29-4845-A26C-75B0F60C39F3}"/>
+                <a16:creationId xmlns:a16="http://schemas.microsoft.com/office/drawing/2014/main" id="{2A547DAE-C379-43F0-AEAA-A5115B49E4F7}"/>
               </a:ext>
             </a:extLst>
           </p:cNvPr>
@@ -7861,7 +7861,7 @@
           <p:cNvPr id="3" name="">
             <a:extLst xmlns:a="http://schemas.openxmlformats.org/drawingml/2006/main">
               <a:ext uri="{FF2B5EF4-FFF2-40B4-BE49-F238E27FC236}">
-                <a16:creationId xmlns:a16="http://schemas.microsoft.com/office/drawing/2014/main" id="{7E2CAAD1-FB6E-40B0-B73D-A1716B2FE9A1}"/>
+                <a16:creationId xmlns:a16="http://schemas.microsoft.com/office/drawing/2014/main" id="{DC04F0E0-C106-4D8C-A624-B3F0082884DD}"/>
               </a:ext>
             </a:extLst>
           </p:cNvPr>
@@ -7893,7 +7893,7 @@
           <p:cNvPr id="4" name="">
             <a:extLst xmlns:a="http://schemas.openxmlformats.org/drawingml/2006/main">
               <a:ext uri="{FF2B5EF4-FFF2-40B4-BE49-F238E27FC236}">
-                <a16:creationId xmlns:a16="http://schemas.microsoft.com/office/drawing/2014/main" id="{BCA071AD-BAA0-4D19-AD4D-DE5E9CE4D9EB}"/>
+                <a16:creationId xmlns:a16="http://schemas.microsoft.com/office/drawing/2014/main" id="{20509238-6850-4E92-A532-EFD500F3DE1C}"/>
               </a:ext>
             </a:extLst>
           </p:cNvPr>
@@ -7950,7 +7950,7 @@
           <p:cNvPr id="5" name="">
             <a:extLst xmlns:a="http://schemas.openxmlformats.org/drawingml/2006/main">
               <a:ext uri="{FF2B5EF4-FFF2-40B4-BE49-F238E27FC236}">
-                <a16:creationId xmlns:a16="http://schemas.microsoft.com/office/drawing/2014/main" id="{EE447126-6473-42D1-A1F7-64F3057CB1ED}"/>
+                <a16:creationId xmlns:a16="http://schemas.microsoft.com/office/drawing/2014/main" id="{1BD39196-10F8-4585-B625-BE3D1FAEED51}"/>
               </a:ext>
             </a:extLst>
           </p:cNvPr>
@@ -8007,7 +8007,7 @@
           <p:cNvPr id="6" name="">
             <a:extLst xmlns:a="http://schemas.openxmlformats.org/drawingml/2006/main">
               <a:ext uri="{FF2B5EF4-FFF2-40B4-BE49-F238E27FC236}">
-                <a16:creationId xmlns:a16="http://schemas.microsoft.com/office/drawing/2014/main" id="{10E8A786-3A69-46F0-BBF8-4DBD62913680}"/>
+                <a16:creationId xmlns:a16="http://schemas.microsoft.com/office/drawing/2014/main" id="{964E0130-C233-48F9-BEA1-5E4EE0BF443E}"/>
               </a:ext>
             </a:extLst>
           </p:cNvPr>
@@ -8064,7 +8064,7 @@
           <p:cNvPr id="7" name="">
             <a:extLst xmlns:a="http://schemas.openxmlformats.org/drawingml/2006/main">
               <a:ext uri="{FF2B5EF4-FFF2-40B4-BE49-F238E27FC236}">
-                <a16:creationId xmlns:a16="http://schemas.microsoft.com/office/drawing/2014/main" id="{CDDE016D-010F-4105-95C2-594BC205F3C0}"/>
+                <a16:creationId xmlns:a16="http://schemas.microsoft.com/office/drawing/2014/main" id="{BE65AE3B-84F9-4296-871E-7485CAF41931}"/>
               </a:ext>
             </a:extLst>
           </p:cNvPr>
@@ -8096,7 +8096,7 @@
           <p:cNvPr id="8" name="">
             <a:extLst xmlns:a="http://schemas.openxmlformats.org/drawingml/2006/main">
               <a:ext uri="{FF2B5EF4-FFF2-40B4-BE49-F238E27FC236}">
-                <a16:creationId xmlns:a16="http://schemas.microsoft.com/office/drawing/2014/main" id="{820A6264-EE89-4D8B-89DD-02A49D32E6D7}"/>
+                <a16:creationId xmlns:a16="http://schemas.microsoft.com/office/drawing/2014/main" id="{E297E369-9EF3-4A98-AFEE-D2EFA5774DC6}"/>
               </a:ext>
             </a:extLst>
           </p:cNvPr>
@@ -8153,7 +8153,7 @@
           <p:cNvPr id="9" name="">
             <a:extLst xmlns:a="http://schemas.openxmlformats.org/drawingml/2006/main">
               <a:ext uri="{FF2B5EF4-FFF2-40B4-BE49-F238E27FC236}">
-                <a16:creationId xmlns:a16="http://schemas.microsoft.com/office/drawing/2014/main" id="{9B1648CD-2F40-436C-AE27-91E5E8576969}"/>
+                <a16:creationId xmlns:a16="http://schemas.microsoft.com/office/drawing/2014/main" id="{634BD5A2-F4F6-47D6-8213-5F48DED3369C}"/>
               </a:ext>
             </a:extLst>
           </p:cNvPr>
@@ -8210,19 +8210,19 @@
           <p:cNvPr id="10" name="">
             <a:extLst xmlns:a="http://schemas.openxmlformats.org/drawingml/2006/main">
               <a:ext uri="{FF2B5EF4-FFF2-40B4-BE49-F238E27FC236}">
-                <a16:creationId xmlns:a16="http://schemas.microsoft.com/office/drawing/2014/main" id="{0061CB71-AAA5-4C54-A3C8-3DC688DAEDB0}"/>
-              </a:ext>
-            </a:extLst>
-          </p:cNvPr>
-          <p:cNvSpPr>
-            <a:spLocks xmlns:a="http://schemas.openxmlformats.org/drawingml/2006/main" noGrp="1"/>
-          </p:cNvSpPr>
-          <p:nvPr/>
-        </p:nvSpPr>
-        <p:spPr>
-          <a:xfrm xmlns:a="http://schemas.openxmlformats.org/drawingml/2006/main">
-            <a:off x="914400" y="1257300"/>
-            <a:ext cx="10363200" cy="781050"/>
+                <a16:creationId xmlns:a16="http://schemas.microsoft.com/office/drawing/2014/main" id="{E35250B7-57A6-43FD-B31B-06299A000E6C}"/>
+              </a:ext>
+            </a:extLst>
+          </p:cNvPr>
+          <p:cNvSpPr>
+            <a:spLocks xmlns:a="http://schemas.openxmlformats.org/drawingml/2006/main" noGrp="1"/>
+          </p:cNvSpPr>
+          <p:nvPr/>
+        </p:nvSpPr>
+        <p:spPr>
+          <a:xfrm xmlns:a="http://schemas.openxmlformats.org/drawingml/2006/main">
+            <a:off x="857250" y="1219200"/>
+            <a:ext cx="10477500" cy="742950"/>
           </a:xfrm>
           <a:prstGeom xmlns:a="http://schemas.openxmlformats.org/drawingml/2006/main" prst="rect">
             <a:avLst/>
@@ -8239,7 +8239,7 @@
           <a:lstStyle xmlns:a="http://schemas.openxmlformats.org/drawingml/2006/main"/>
           <a:p xmlns:a="http://schemas.openxmlformats.org/drawingml/2006/main">
             <a:pPr algn="ctr">
-              <a:defRPr sz="2175" b="1">
+              <a:defRPr sz="2100" b="1">
                 <a:solidFill>
                   <a:srgbClr val="17253A"/>
                 </a:solidFill>
@@ -8249,7 +8249,7 @@
               </a:defRPr>
             </a:pPr>
             <a:r>
-              <a:rPr sz="2175" b="1">
+              <a:rPr sz="2100" b="1">
                 <a:solidFill>
                   <a:srgbClr val="17253A"/>
                 </a:solidFill>
@@ -8267,28 +8267,30 @@
           <p:cNvPr id="11" name="">
             <a:extLst xmlns:a="http://schemas.openxmlformats.org/drawingml/2006/main">
               <a:ext uri="{FF2B5EF4-FFF2-40B4-BE49-F238E27FC236}">
-                <a16:creationId xmlns:a16="http://schemas.microsoft.com/office/drawing/2014/main" id="{540C28A2-E941-4C90-90F0-B1AA1E10474B}"/>
-              </a:ext>
-            </a:extLst>
-          </p:cNvPr>
-          <p:cNvSpPr>
-            <a:spLocks xmlns:a="http://schemas.openxmlformats.org/drawingml/2006/main" noGrp="1"/>
-          </p:cNvSpPr>
-          <p:nvPr/>
-        </p:nvSpPr>
-        <p:spPr>
-          <a:xfrm xmlns:a="http://schemas.openxmlformats.org/drawingml/2006/main">
-            <a:off x="1000125" y="2247900"/>
-            <a:ext cx="476250" cy="476250"/>
-          </a:xfrm>
-          <a:prstGeom xmlns:a="http://schemas.openxmlformats.org/drawingml/2006/main" prst="ellipse">
+                <a16:creationId xmlns:a16="http://schemas.microsoft.com/office/drawing/2014/main" id="{AD189CF2-A528-4213-B70F-FE1CA2F51081}"/>
+              </a:ext>
+            </a:extLst>
+          </p:cNvPr>
+          <p:cNvSpPr>
+            <a:spLocks xmlns:a="http://schemas.openxmlformats.org/drawingml/2006/main" noGrp="1"/>
+          </p:cNvSpPr>
+          <p:nvPr/>
+        </p:nvSpPr>
+        <p:spPr>
+          <a:xfrm xmlns:a="http://schemas.openxmlformats.org/drawingml/2006/main">
+            <a:off x="971550" y="2124075"/>
+            <a:ext cx="38100" cy="3524250"/>
+          </a:xfrm>
+          <a:prstGeom xmlns:a="http://schemas.openxmlformats.org/drawingml/2006/main" prst="rect">
             <a:avLst/>
           </a:prstGeom>
           <a:solidFill xmlns:a="http://schemas.openxmlformats.org/drawingml/2006/main">
-            <a:srgbClr val="18324A"/>
+            <a:srgbClr val="2C6E73"/>
           </a:solidFill>
           <a:ln xmlns:a="http://schemas.openxmlformats.org/drawingml/2006/main" w="0">
-            <a:noFill/>
+            <a:solidFill>
+              <a:srgbClr val="2C6E73"/>
+            </a:solidFill>
           </a:ln>
         </p:spPr>
       </p:sp>
@@ -8297,19 +8299,19 @@
           <p:cNvPr id="12" name="">
             <a:extLst xmlns:a="http://schemas.openxmlformats.org/drawingml/2006/main">
               <a:ext uri="{FF2B5EF4-FFF2-40B4-BE49-F238E27FC236}">
-                <a16:creationId xmlns:a16="http://schemas.microsoft.com/office/drawing/2014/main" id="{1EB1F93F-CE6F-480B-8F04-D2A1E281346F}"/>
-              </a:ext>
-            </a:extLst>
-          </p:cNvPr>
-          <p:cNvSpPr>
-            <a:spLocks xmlns:a="http://schemas.openxmlformats.org/drawingml/2006/main" noGrp="1"/>
-          </p:cNvSpPr>
-          <p:nvPr/>
-        </p:nvSpPr>
-        <p:spPr>
-          <a:xfrm xmlns:a="http://schemas.openxmlformats.org/drawingml/2006/main">
-            <a:off x="1000125" y="2276475"/>
-            <a:ext cx="476250" cy="419100"/>
+                <a16:creationId xmlns:a16="http://schemas.microsoft.com/office/drawing/2014/main" id="{76351136-A5CF-4C2E-8E9E-67411CF4CAE7}"/>
+              </a:ext>
+            </a:extLst>
+          </p:cNvPr>
+          <p:cNvSpPr>
+            <a:spLocks xmlns:a="http://schemas.openxmlformats.org/drawingml/2006/main" noGrp="1"/>
+          </p:cNvSpPr>
+          <p:nvPr/>
+        </p:nvSpPr>
+        <p:spPr>
+          <a:xfrm xmlns:a="http://schemas.openxmlformats.org/drawingml/2006/main">
+            <a:off x="1162050" y="2200275"/>
+            <a:ext cx="400050" cy="400050"/>
           </a:xfrm>
           <a:prstGeom xmlns:a="http://schemas.openxmlformats.org/drawingml/2006/main" prst="rect">
             <a:avLst/>
@@ -8326,9 +8328,9 @@
           <a:lstStyle xmlns:a="http://schemas.openxmlformats.org/drawingml/2006/main"/>
           <a:p xmlns:a="http://schemas.openxmlformats.org/drawingml/2006/main">
             <a:pPr algn="ctr">
-              <a:defRPr sz="1350" b="1">
-                <a:solidFill>
-                  <a:srgbClr val="FFFFFF"/>
+              <a:defRPr sz="1125" b="1">
+                <a:solidFill>
+                  <a:srgbClr val="2C6E73"/>
                 </a:solidFill>
                 <a:latin typeface="Arial"/>
                 <a:ea typeface="Arial"/>
@@ -8336,9 +8338,9 @@
               </a:defRPr>
             </a:pPr>
             <a:r>
-              <a:rPr sz="1350" b="1">
-                <a:solidFill>
-                  <a:srgbClr val="FFFFFF"/>
+              <a:rPr sz="1125" b="1">
+                <a:solidFill>
+                  <a:srgbClr val="2C6E73"/>
                 </a:solidFill>
                 <a:latin typeface="Arial"/>
                 <a:ea typeface="Arial"/>
@@ -8354,19 +8356,19 @@
           <p:cNvPr id="13" name="">
             <a:extLst xmlns:a="http://schemas.openxmlformats.org/drawingml/2006/main">
               <a:ext uri="{FF2B5EF4-FFF2-40B4-BE49-F238E27FC236}">
-                <a16:creationId xmlns:a16="http://schemas.microsoft.com/office/drawing/2014/main" id="{57967C60-C7CA-4413-A194-44C7CBBC6731}"/>
-              </a:ext>
-            </a:extLst>
-          </p:cNvPr>
-          <p:cNvSpPr>
-            <a:spLocks xmlns:a="http://schemas.openxmlformats.org/drawingml/2006/main" noGrp="1"/>
-          </p:cNvSpPr>
-          <p:nvPr/>
-        </p:nvSpPr>
-        <p:spPr>
-          <a:xfrm xmlns:a="http://schemas.openxmlformats.org/drawingml/2006/main">
-            <a:off x="1714500" y="2181225"/>
-            <a:ext cx="9429750" cy="609600"/>
+                <a16:creationId xmlns:a16="http://schemas.microsoft.com/office/drawing/2014/main" id="{8D006176-DA08-46B3-A467-CD082BC914FD}"/>
+              </a:ext>
+            </a:extLst>
+          </p:cNvPr>
+          <p:cNvSpPr>
+            <a:spLocks xmlns:a="http://schemas.openxmlformats.org/drawingml/2006/main" noGrp="1"/>
+          </p:cNvSpPr>
+          <p:nvPr/>
+        </p:nvSpPr>
+        <p:spPr>
+          <a:xfrm xmlns:a="http://schemas.openxmlformats.org/drawingml/2006/main">
+            <a:off x="1714500" y="2114550"/>
+            <a:ext cx="9525000" cy="809625"/>
           </a:xfrm>
           <a:prstGeom xmlns:a="http://schemas.openxmlformats.org/drawingml/2006/main" prst="rect">
             <a:avLst/>
@@ -8383,7 +8385,7 @@
           <a:lstStyle xmlns:a="http://schemas.openxmlformats.org/drawingml/2006/main"/>
           <a:p xmlns:a="http://schemas.openxmlformats.org/drawingml/2006/main">
             <a:pPr algn="l">
-              <a:defRPr sz="1500" b="0">
+              <a:defRPr sz="1725" b="0">
                 <a:solidFill>
                   <a:srgbClr val="17253A"/>
                 </a:solidFill>
@@ -8393,7 +8395,7 @@
               </a:defRPr>
             </a:pPr>
             <a:r>
-              <a:rPr sz="1500" b="0">
+              <a:rPr sz="1725" b="0">
                 <a:solidFill>
                   <a:srgbClr val="17253A"/>
                 </a:solidFill>
@@ -8401,7 +8403,7 @@
                 <a:ea typeface="Arial"/>
                 <a:cs typeface="Arial"/>
               </a:rPr>
-              <a:t>Identify the structure: Read or record x before y and note the quadrant.</a:t>
+              <a:t>Start (4, -2)</a:t>
             </a:r>
           </a:p>
         </p:txBody>
@@ -8411,28 +8413,30 @@
           <p:cNvPr id="14" name="">
             <a:extLst xmlns:a="http://schemas.openxmlformats.org/drawingml/2006/main">
               <a:ext uri="{FF2B5EF4-FFF2-40B4-BE49-F238E27FC236}">
-                <a16:creationId xmlns:a16="http://schemas.microsoft.com/office/drawing/2014/main" id="{EC9B03A6-3C52-4594-837C-3E3C322E51FA}"/>
-              </a:ext>
-            </a:extLst>
-          </p:cNvPr>
-          <p:cNvSpPr>
-            <a:spLocks xmlns:a="http://schemas.openxmlformats.org/drawingml/2006/main" noGrp="1"/>
-          </p:cNvSpPr>
-          <p:nvPr/>
-        </p:nvSpPr>
-        <p:spPr>
-          <a:xfrm xmlns:a="http://schemas.openxmlformats.org/drawingml/2006/main">
-            <a:off x="1000125" y="2990850"/>
-            <a:ext cx="476250" cy="476250"/>
-          </a:xfrm>
-          <a:prstGeom xmlns:a="http://schemas.openxmlformats.org/drawingml/2006/main" prst="ellipse">
+                <a16:creationId xmlns:a16="http://schemas.microsoft.com/office/drawing/2014/main" id="{DC84AE76-108F-44B5-8B39-80108FF802B3}"/>
+              </a:ext>
+            </a:extLst>
+          </p:cNvPr>
+          <p:cNvSpPr>
+            <a:spLocks xmlns:a="http://schemas.openxmlformats.org/drawingml/2006/main" noGrp="1"/>
+          </p:cNvSpPr>
+          <p:nvPr/>
+        </p:nvSpPr>
+        <p:spPr>
+          <a:xfrm xmlns:a="http://schemas.openxmlformats.org/drawingml/2006/main">
+            <a:off x="1714500" y="2943225"/>
+            <a:ext cx="9334500" cy="9525"/>
+          </a:xfrm>
+          <a:prstGeom xmlns:a="http://schemas.openxmlformats.org/drawingml/2006/main" prst="rect">
             <a:avLst/>
           </a:prstGeom>
           <a:solidFill xmlns:a="http://schemas.openxmlformats.org/drawingml/2006/main">
-            <a:srgbClr val="2C6E73"/>
+            <a:srgbClr val="D9E0E6"/>
           </a:solidFill>
           <a:ln xmlns:a="http://schemas.openxmlformats.org/drawingml/2006/main" w="0">
-            <a:noFill/>
+            <a:solidFill>
+              <a:srgbClr val="D9E0E6"/>
+            </a:solidFill>
           </a:ln>
         </p:spPr>
       </p:sp>
@@ -8441,19 +8445,19 @@
           <p:cNvPr id="15" name="">
             <a:extLst xmlns:a="http://schemas.openxmlformats.org/drawingml/2006/main">
               <a:ext uri="{FF2B5EF4-FFF2-40B4-BE49-F238E27FC236}">
-                <a16:creationId xmlns:a16="http://schemas.microsoft.com/office/drawing/2014/main" id="{14F76253-4806-4749-A8D9-B732A518C5BB}"/>
-              </a:ext>
-            </a:extLst>
-          </p:cNvPr>
-          <p:cNvSpPr>
-            <a:spLocks xmlns:a="http://schemas.openxmlformats.org/drawingml/2006/main" noGrp="1"/>
-          </p:cNvSpPr>
-          <p:nvPr/>
-        </p:nvSpPr>
-        <p:spPr>
-          <a:xfrm xmlns:a="http://schemas.openxmlformats.org/drawingml/2006/main">
-            <a:off x="1000125" y="3019425"/>
-            <a:ext cx="476250" cy="419100"/>
+                <a16:creationId xmlns:a16="http://schemas.microsoft.com/office/drawing/2014/main" id="{BC88D632-E6AB-41F5-897E-641A8C0E9EC9}"/>
+              </a:ext>
+            </a:extLst>
+          </p:cNvPr>
+          <p:cNvSpPr>
+            <a:spLocks xmlns:a="http://schemas.openxmlformats.org/drawingml/2006/main" noGrp="1"/>
+          </p:cNvSpPr>
+          <p:nvPr/>
+        </p:nvSpPr>
+        <p:spPr>
+          <a:xfrm xmlns:a="http://schemas.openxmlformats.org/drawingml/2006/main">
+            <a:off x="1162050" y="3076575"/>
+            <a:ext cx="400050" cy="400050"/>
           </a:xfrm>
           <a:prstGeom xmlns:a="http://schemas.openxmlformats.org/drawingml/2006/main" prst="rect">
             <a:avLst/>
@@ -8470,9 +8474,9 @@
           <a:lstStyle xmlns:a="http://schemas.openxmlformats.org/drawingml/2006/main"/>
           <a:p xmlns:a="http://schemas.openxmlformats.org/drawingml/2006/main">
             <a:pPr algn="ctr">
-              <a:defRPr sz="1350" b="1">
-                <a:solidFill>
-                  <a:srgbClr val="FFFFFF"/>
+              <a:defRPr sz="1125" b="1">
+                <a:solidFill>
+                  <a:srgbClr val="2C6E73"/>
                 </a:solidFill>
                 <a:latin typeface="Arial"/>
                 <a:ea typeface="Arial"/>
@@ -8480,9 +8484,9 @@
               </a:defRPr>
             </a:pPr>
             <a:r>
-              <a:rPr sz="1350" b="1">
-                <a:solidFill>
-                  <a:srgbClr val="FFFFFF"/>
+              <a:rPr sz="1125" b="1">
+                <a:solidFill>
+                  <a:srgbClr val="2C6E73"/>
                 </a:solidFill>
                 <a:latin typeface="Arial"/>
                 <a:ea typeface="Arial"/>
@@ -8498,19 +8502,19 @@
           <p:cNvPr id="16" name="">
             <a:extLst xmlns:a="http://schemas.openxmlformats.org/drawingml/2006/main">
               <a:ext uri="{FF2B5EF4-FFF2-40B4-BE49-F238E27FC236}">
-                <a16:creationId xmlns:a16="http://schemas.microsoft.com/office/drawing/2014/main" id="{69F34FE3-2389-4851-8BDD-0311F03C51CB}"/>
-              </a:ext>
-            </a:extLst>
-          </p:cNvPr>
-          <p:cNvSpPr>
-            <a:spLocks xmlns:a="http://schemas.openxmlformats.org/drawingml/2006/main" noGrp="1"/>
-          </p:cNvSpPr>
-          <p:nvPr/>
-        </p:nvSpPr>
-        <p:spPr>
-          <a:xfrm xmlns:a="http://schemas.openxmlformats.org/drawingml/2006/main">
-            <a:off x="1714500" y="2924175"/>
-            <a:ext cx="9429750" cy="609600"/>
+                <a16:creationId xmlns:a16="http://schemas.microsoft.com/office/drawing/2014/main" id="{C43C6FAC-C16A-4B48-AB29-4E635FE4895A}"/>
+              </a:ext>
+            </a:extLst>
+          </p:cNvPr>
+          <p:cNvSpPr>
+            <a:spLocks xmlns:a="http://schemas.openxmlformats.org/drawingml/2006/main" noGrp="1"/>
+          </p:cNvSpPr>
+          <p:nvPr/>
+        </p:nvSpPr>
+        <p:spPr>
+          <a:xfrm xmlns:a="http://schemas.openxmlformats.org/drawingml/2006/main">
+            <a:off x="1714500" y="2990850"/>
+            <a:ext cx="9525000" cy="809625"/>
           </a:xfrm>
           <a:prstGeom xmlns:a="http://schemas.openxmlformats.org/drawingml/2006/main" prst="rect">
             <a:avLst/>
@@ -8527,7 +8531,7 @@
           <a:lstStyle xmlns:a="http://schemas.openxmlformats.org/drawingml/2006/main"/>
           <a:p xmlns:a="http://schemas.openxmlformats.org/drawingml/2006/main">
             <a:pPr algn="l">
-              <a:defRPr sz="1500" b="0">
+              <a:defRPr sz="1725" b="0">
                 <a:solidFill>
                   <a:srgbClr val="17253A"/>
                 </a:solidFill>
@@ -8537,7 +8541,7 @@
               </a:defRPr>
             </a:pPr>
             <a:r>
-              <a:rPr sz="1500" b="0">
+              <a:rPr sz="1725" b="0">
                 <a:solidFill>
                   <a:srgbClr val="17253A"/>
                 </a:solidFill>
@@ -8545,7 +8549,7 @@
                 <a:ea typeface="Arial"/>
                 <a:cs typeface="Arial"/>
               </a:rPr>
-              <a:t>Set up the method: Apply the same vector or mirror line to every vertex.</a:t>
+              <a:t>3 left: x = 4 - 3 = 1</a:t>
             </a:r>
           </a:p>
         </p:txBody>
@@ -8555,28 +8559,30 @@
           <p:cNvPr id="17" name="">
             <a:extLst xmlns:a="http://schemas.openxmlformats.org/drawingml/2006/main">
               <a:ext uri="{FF2B5EF4-FFF2-40B4-BE49-F238E27FC236}">
-                <a16:creationId xmlns:a16="http://schemas.microsoft.com/office/drawing/2014/main" id="{08533571-EA4A-484D-A444-4DB7097371ED}"/>
-              </a:ext>
-            </a:extLst>
-          </p:cNvPr>
-          <p:cNvSpPr>
-            <a:spLocks xmlns:a="http://schemas.openxmlformats.org/drawingml/2006/main" noGrp="1"/>
-          </p:cNvSpPr>
-          <p:nvPr/>
-        </p:nvSpPr>
-        <p:spPr>
-          <a:xfrm xmlns:a="http://schemas.openxmlformats.org/drawingml/2006/main">
-            <a:off x="1000125" y="3733800"/>
-            <a:ext cx="476250" cy="476250"/>
-          </a:xfrm>
-          <a:prstGeom xmlns:a="http://schemas.openxmlformats.org/drawingml/2006/main" prst="ellipse">
+                <a16:creationId xmlns:a16="http://schemas.microsoft.com/office/drawing/2014/main" id="{5875AAF7-5643-4D9E-B430-4776C9F08B88}"/>
+              </a:ext>
+            </a:extLst>
+          </p:cNvPr>
+          <p:cNvSpPr>
+            <a:spLocks xmlns:a="http://schemas.openxmlformats.org/drawingml/2006/main" noGrp="1"/>
+          </p:cNvSpPr>
+          <p:nvPr/>
+        </p:nvSpPr>
+        <p:spPr>
+          <a:xfrm xmlns:a="http://schemas.openxmlformats.org/drawingml/2006/main">
+            <a:off x="1714500" y="3819525"/>
+            <a:ext cx="9334500" cy="9525"/>
+          </a:xfrm>
+          <a:prstGeom xmlns:a="http://schemas.openxmlformats.org/drawingml/2006/main" prst="rect">
             <a:avLst/>
           </a:prstGeom>
           <a:solidFill xmlns:a="http://schemas.openxmlformats.org/drawingml/2006/main">
-            <a:srgbClr val="2C6E73"/>
+            <a:srgbClr val="D9E0E6"/>
           </a:solidFill>
           <a:ln xmlns:a="http://schemas.openxmlformats.org/drawingml/2006/main" w="0">
-            <a:noFill/>
+            <a:solidFill>
+              <a:srgbClr val="D9E0E6"/>
+            </a:solidFill>
           </a:ln>
         </p:spPr>
       </p:sp>
@@ -8585,19 +8591,19 @@
           <p:cNvPr id="18" name="">
             <a:extLst xmlns:a="http://schemas.openxmlformats.org/drawingml/2006/main">
               <a:ext uri="{FF2B5EF4-FFF2-40B4-BE49-F238E27FC236}">
-                <a16:creationId xmlns:a16="http://schemas.microsoft.com/office/drawing/2014/main" id="{1532FD4D-7CE4-4DD8-BDDD-CC58A163647E}"/>
-              </a:ext>
-            </a:extLst>
-          </p:cNvPr>
-          <p:cNvSpPr>
-            <a:spLocks xmlns:a="http://schemas.openxmlformats.org/drawingml/2006/main" noGrp="1"/>
-          </p:cNvSpPr>
-          <p:nvPr/>
-        </p:nvSpPr>
-        <p:spPr>
-          <a:xfrm xmlns:a="http://schemas.openxmlformats.org/drawingml/2006/main">
-            <a:off x="1000125" y="3762375"/>
-            <a:ext cx="476250" cy="419100"/>
+                <a16:creationId xmlns:a16="http://schemas.microsoft.com/office/drawing/2014/main" id="{B83F0A84-6BC6-4CA0-8C2B-65AAE5B04A67}"/>
+              </a:ext>
+            </a:extLst>
+          </p:cNvPr>
+          <p:cNvSpPr>
+            <a:spLocks xmlns:a="http://schemas.openxmlformats.org/drawingml/2006/main" noGrp="1"/>
+          </p:cNvSpPr>
+          <p:nvPr/>
+        </p:nvSpPr>
+        <p:spPr>
+          <a:xfrm xmlns:a="http://schemas.openxmlformats.org/drawingml/2006/main">
+            <a:off x="1162050" y="3952875"/>
+            <a:ext cx="400050" cy="400050"/>
           </a:xfrm>
           <a:prstGeom xmlns:a="http://schemas.openxmlformats.org/drawingml/2006/main" prst="rect">
             <a:avLst/>
@@ -8614,9 +8620,9 @@
           <a:lstStyle xmlns:a="http://schemas.openxmlformats.org/drawingml/2006/main"/>
           <a:p xmlns:a="http://schemas.openxmlformats.org/drawingml/2006/main">
             <a:pPr algn="ctr">
-              <a:defRPr sz="1350" b="1">
-                <a:solidFill>
-                  <a:srgbClr val="FFFFFF"/>
+              <a:defRPr sz="1125" b="1">
+                <a:solidFill>
+                  <a:srgbClr val="2C6E73"/>
                 </a:solidFill>
                 <a:latin typeface="Arial"/>
                 <a:ea typeface="Arial"/>
@@ -8624,9 +8630,9 @@
               </a:defRPr>
             </a:pPr>
             <a:r>
-              <a:rPr sz="1350" b="1">
-                <a:solidFill>
-                  <a:srgbClr val="FFFFFF"/>
+              <a:rPr sz="1125" b="1">
+                <a:solidFill>
+                  <a:srgbClr val="2C6E73"/>
                 </a:solidFill>
                 <a:latin typeface="Arial"/>
                 <a:ea typeface="Arial"/>
@@ -8642,19 +8648,19 @@
           <p:cNvPr id="19" name="">
             <a:extLst xmlns:a="http://schemas.openxmlformats.org/drawingml/2006/main">
               <a:ext uri="{FF2B5EF4-FFF2-40B4-BE49-F238E27FC236}">
-                <a16:creationId xmlns:a16="http://schemas.microsoft.com/office/drawing/2014/main" id="{F3D20462-1AFB-4610-98E1-91C55C8B1317}"/>
-              </a:ext>
-            </a:extLst>
-          </p:cNvPr>
-          <p:cNvSpPr>
-            <a:spLocks xmlns:a="http://schemas.openxmlformats.org/drawingml/2006/main" noGrp="1"/>
-          </p:cNvSpPr>
-          <p:nvPr/>
-        </p:nvSpPr>
-        <p:spPr>
-          <a:xfrm xmlns:a="http://schemas.openxmlformats.org/drawingml/2006/main">
-            <a:off x="1714500" y="3667125"/>
-            <a:ext cx="9429750" cy="609600"/>
+                <a16:creationId xmlns:a16="http://schemas.microsoft.com/office/drawing/2014/main" id="{2A495B29-E5AD-41AA-99AA-1A3E2D560E9C}"/>
+              </a:ext>
+            </a:extLst>
+          </p:cNvPr>
+          <p:cNvSpPr>
+            <a:spLocks xmlns:a="http://schemas.openxmlformats.org/drawingml/2006/main" noGrp="1"/>
+          </p:cNvSpPr>
+          <p:nvPr/>
+        </p:nvSpPr>
+        <p:spPr>
+          <a:xfrm xmlns:a="http://schemas.openxmlformats.org/drawingml/2006/main">
+            <a:off x="1714500" y="3867150"/>
+            <a:ext cx="9525000" cy="809625"/>
           </a:xfrm>
           <a:prstGeom xmlns:a="http://schemas.openxmlformats.org/drawingml/2006/main" prst="rect">
             <a:avLst/>
@@ -8671,7 +8677,7 @@
           <a:lstStyle xmlns:a="http://schemas.openxmlformats.org/drawingml/2006/main"/>
           <a:p xmlns:a="http://schemas.openxmlformats.org/drawingml/2006/main">
             <a:pPr algn="l">
-              <a:defRPr sz="1500" b="0">
+              <a:defRPr sz="1725" b="0">
                 <a:solidFill>
                   <a:srgbClr val="17253A"/>
                 </a:solidFill>
@@ -8681,7 +8687,7 @@
               </a:defRPr>
             </a:pPr>
             <a:r>
-              <a:rPr sz="1500" b="0">
+              <a:rPr sz="1725" b="0">
                 <a:solidFill>
                   <a:srgbClr val="17253A"/>
                 </a:solidFill>
@@ -8689,7 +8695,7 @@
                 <a:ea typeface="Arial"/>
                 <a:cs typeface="Arial"/>
               </a:rPr>
-              <a:t>Complete the calculation: (1, 3).</a:t>
+              <a:t>5 up: y = -2 + 5 = 3</a:t>
             </a:r>
           </a:p>
         </p:txBody>
@@ -8699,28 +8705,30 @@
           <p:cNvPr id="20" name="">
             <a:extLst xmlns:a="http://schemas.openxmlformats.org/drawingml/2006/main">
               <a:ext uri="{FF2B5EF4-FFF2-40B4-BE49-F238E27FC236}">
-                <a16:creationId xmlns:a16="http://schemas.microsoft.com/office/drawing/2014/main" id="{EA198CFA-3A52-47AB-B9AB-A99A066A6925}"/>
-              </a:ext>
-            </a:extLst>
-          </p:cNvPr>
-          <p:cNvSpPr>
-            <a:spLocks xmlns:a="http://schemas.openxmlformats.org/drawingml/2006/main" noGrp="1"/>
-          </p:cNvSpPr>
-          <p:nvPr/>
-        </p:nvSpPr>
-        <p:spPr>
-          <a:xfrm xmlns:a="http://schemas.openxmlformats.org/drawingml/2006/main">
-            <a:off x="1000125" y="4476750"/>
-            <a:ext cx="476250" cy="476250"/>
-          </a:xfrm>
-          <a:prstGeom xmlns:a="http://schemas.openxmlformats.org/drawingml/2006/main" prst="ellipse">
+                <a16:creationId xmlns:a16="http://schemas.microsoft.com/office/drawing/2014/main" id="{1156A8FD-0FEE-46DA-B1B5-DFDFA4868E52}"/>
+              </a:ext>
+            </a:extLst>
+          </p:cNvPr>
+          <p:cNvSpPr>
+            <a:spLocks xmlns:a="http://schemas.openxmlformats.org/drawingml/2006/main" noGrp="1"/>
+          </p:cNvSpPr>
+          <p:nvPr/>
+        </p:nvSpPr>
+        <p:spPr>
+          <a:xfrm xmlns:a="http://schemas.openxmlformats.org/drawingml/2006/main">
+            <a:off x="1714500" y="4695825"/>
+            <a:ext cx="9334500" cy="9525"/>
+          </a:xfrm>
+          <a:prstGeom xmlns:a="http://schemas.openxmlformats.org/drawingml/2006/main" prst="rect">
             <a:avLst/>
           </a:prstGeom>
           <a:solidFill xmlns:a="http://schemas.openxmlformats.org/drawingml/2006/main">
-            <a:srgbClr val="2C6E73"/>
+            <a:srgbClr val="D9E0E6"/>
           </a:solidFill>
           <a:ln xmlns:a="http://schemas.openxmlformats.org/drawingml/2006/main" w="0">
-            <a:noFill/>
+            <a:solidFill>
+              <a:srgbClr val="D9E0E6"/>
+            </a:solidFill>
           </a:ln>
         </p:spPr>
       </p:sp>
@@ -8729,19 +8737,19 @@
           <p:cNvPr id="21" name="">
             <a:extLst xmlns:a="http://schemas.openxmlformats.org/drawingml/2006/main">
               <a:ext uri="{FF2B5EF4-FFF2-40B4-BE49-F238E27FC236}">
-                <a16:creationId xmlns:a16="http://schemas.microsoft.com/office/drawing/2014/main" id="{01EF4FB0-36E8-4E38-A5AC-2785CF4D8FDB}"/>
-              </a:ext>
-            </a:extLst>
-          </p:cNvPr>
-          <p:cNvSpPr>
-            <a:spLocks xmlns:a="http://schemas.openxmlformats.org/drawingml/2006/main" noGrp="1"/>
-          </p:cNvSpPr>
-          <p:nvPr/>
-        </p:nvSpPr>
-        <p:spPr>
-          <a:xfrm xmlns:a="http://schemas.openxmlformats.org/drawingml/2006/main">
-            <a:off x="1000125" y="4505325"/>
-            <a:ext cx="476250" cy="419100"/>
+                <a16:creationId xmlns:a16="http://schemas.microsoft.com/office/drawing/2014/main" id="{4091DBD9-9246-45B7-945F-1BB4E3E99871}"/>
+              </a:ext>
+            </a:extLst>
+          </p:cNvPr>
+          <p:cNvSpPr>
+            <a:spLocks xmlns:a="http://schemas.openxmlformats.org/drawingml/2006/main" noGrp="1"/>
+          </p:cNvSpPr>
+          <p:nvPr/>
+        </p:nvSpPr>
+        <p:spPr>
+          <a:xfrm xmlns:a="http://schemas.openxmlformats.org/drawingml/2006/main">
+            <a:off x="1162050" y="4829175"/>
+            <a:ext cx="400050" cy="400050"/>
           </a:xfrm>
           <a:prstGeom xmlns:a="http://schemas.openxmlformats.org/drawingml/2006/main" prst="rect">
             <a:avLst/>
@@ -8758,9 +8766,9 @@
           <a:lstStyle xmlns:a="http://schemas.openxmlformats.org/drawingml/2006/main"/>
           <a:p xmlns:a="http://schemas.openxmlformats.org/drawingml/2006/main">
             <a:pPr algn="ctr">
-              <a:defRPr sz="1350" b="1">
-                <a:solidFill>
-                  <a:srgbClr val="FFFFFF"/>
+              <a:defRPr sz="1125" b="1">
+                <a:solidFill>
+                  <a:srgbClr val="2F785D"/>
                 </a:solidFill>
                 <a:latin typeface="Arial"/>
                 <a:ea typeface="Arial"/>
@@ -8768,9 +8776,9 @@
               </a:defRPr>
             </a:pPr>
             <a:r>
-              <a:rPr sz="1350" b="1">
-                <a:solidFill>
-                  <a:srgbClr val="FFFFFF"/>
+              <a:rPr sz="1125" b="1">
+                <a:solidFill>
+                  <a:srgbClr val="2F785D"/>
                 </a:solidFill>
                 <a:latin typeface="Arial"/>
                 <a:ea typeface="Arial"/>
@@ -8786,19 +8794,19 @@
           <p:cNvPr id="22" name="">
             <a:extLst xmlns:a="http://schemas.openxmlformats.org/drawingml/2006/main">
               <a:ext uri="{FF2B5EF4-FFF2-40B4-BE49-F238E27FC236}">
-                <a16:creationId xmlns:a16="http://schemas.microsoft.com/office/drawing/2014/main" id="{51A4B7A2-9EC8-41E9-BEA6-FE3D22B9E8C8}"/>
-              </a:ext>
-            </a:extLst>
-          </p:cNvPr>
-          <p:cNvSpPr>
-            <a:spLocks xmlns:a="http://schemas.openxmlformats.org/drawingml/2006/main" noGrp="1"/>
-          </p:cNvSpPr>
-          <p:nvPr/>
-        </p:nvSpPr>
-        <p:spPr>
-          <a:xfrm xmlns:a="http://schemas.openxmlformats.org/drawingml/2006/main">
-            <a:off x="1714500" y="4410075"/>
-            <a:ext cx="9429750" cy="609600"/>
+                <a16:creationId xmlns:a16="http://schemas.microsoft.com/office/drawing/2014/main" id="{5F09BD5D-335C-4FD9-97B9-256ABEB919C1}"/>
+              </a:ext>
+            </a:extLst>
+          </p:cNvPr>
+          <p:cNvSpPr>
+            <a:spLocks xmlns:a="http://schemas.openxmlformats.org/drawingml/2006/main" noGrp="1"/>
+          </p:cNvSpPr>
+          <p:nvPr/>
+        </p:nvSpPr>
+        <p:spPr>
+          <a:xfrm xmlns:a="http://schemas.openxmlformats.org/drawingml/2006/main">
+            <a:off x="1714500" y="4743450"/>
+            <a:ext cx="9525000" cy="809625"/>
           </a:xfrm>
           <a:prstGeom xmlns:a="http://schemas.openxmlformats.org/drawingml/2006/main" prst="rect">
             <a:avLst/>
@@ -8815,7 +8823,7 @@
           <a:lstStyle xmlns:a="http://schemas.openxmlformats.org/drawingml/2006/main"/>
           <a:p xmlns:a="http://schemas.openxmlformats.org/drawingml/2006/main">
             <a:pPr algn="l">
-              <a:defRPr sz="1500" b="1">
+              <a:defRPr sz="1725" b="1">
                 <a:solidFill>
                   <a:srgbClr val="2F785D"/>
                 </a:solidFill>
@@ -8825,7 +8833,7 @@
               </a:defRPr>
             </a:pPr>
             <a:r>
-              <a:rPr sz="1500" b="1">
+              <a:rPr sz="1725" b="1">
                 <a:solidFill>
                   <a:srgbClr val="2F785D"/>
                 </a:solidFill>
@@ -8833,7 +8841,7 @@
                 <a:ea typeface="Arial"/>
                 <a:cs typeface="Arial"/>
               </a:rPr>
-              <a:t>Check the result: Check side lengths and orientation after the transformation.</a:t>
+              <a:t>New point = (1, 3)</a:t>
             </a:r>
           </a:p>
         </p:txBody>
@@ -8841,7 +8849,7 @@
     </p:spTree>
     <p:extLst>
       <p:ext uri="{BB962C8B-B14F-4D97-AF65-F5344CB8AC3E}">
-        <p14:creationId xmlns:p14="http://schemas.microsoft.com/office/powerpoint/2010/main" val="1064356445"/>
+        <p14:creationId xmlns:p14="http://schemas.microsoft.com/office/powerpoint/2010/main" val="1177371883"/>
       </p:ext>
     </p:extLst>
   </p:cSld>
@@ -9134,7 +9142,7 @@
           <p:cNvPr id="15" name="">
             <a:extLst xmlns:a="http://schemas.openxmlformats.org/drawingml/2006/main">
               <a:ext uri="{FF2B5EF4-FFF2-40B4-BE49-F238E27FC236}">
-                <a16:creationId xmlns:a16="http://schemas.microsoft.com/office/drawing/2014/main" id="{52B1F019-8E60-407C-9307-AEBC2522D549}"/>
+                <a16:creationId xmlns:a16="http://schemas.microsoft.com/office/drawing/2014/main" id="{8F5CAE9A-484F-42C2-92F4-5C9BC668292F}"/>
               </a:ext>
             </a:extLst>
           </p:cNvPr>
@@ -9166,7 +9174,7 @@
           <p:cNvPr id="2" name="">
             <a:extLst xmlns:a="http://schemas.openxmlformats.org/drawingml/2006/main">
               <a:ext uri="{FF2B5EF4-FFF2-40B4-BE49-F238E27FC236}">
-                <a16:creationId xmlns:a16="http://schemas.microsoft.com/office/drawing/2014/main" id="{DBBB7270-C570-48A3-A983-3A20910B9F8A}"/>
+                <a16:creationId xmlns:a16="http://schemas.microsoft.com/office/drawing/2014/main" id="{539ECCDF-5CA7-4D88-AECF-856702817D6C}"/>
               </a:ext>
             </a:extLst>
           </p:cNvPr>
@@ -9223,7 +9231,7 @@
           <p:cNvPr id="3" name="">
             <a:extLst xmlns:a="http://schemas.openxmlformats.org/drawingml/2006/main">
               <a:ext uri="{FF2B5EF4-FFF2-40B4-BE49-F238E27FC236}">
-                <a16:creationId xmlns:a16="http://schemas.microsoft.com/office/drawing/2014/main" id="{3CB290D5-284C-487F-BBBD-35CB51774457}"/>
+                <a16:creationId xmlns:a16="http://schemas.microsoft.com/office/drawing/2014/main" id="{990C3A30-32DA-484A-9E86-22AB610897DF}"/>
               </a:ext>
             </a:extLst>
           </p:cNvPr>
@@ -9255,7 +9263,7 @@
           <p:cNvPr id="4" name="">
             <a:extLst xmlns:a="http://schemas.openxmlformats.org/drawingml/2006/main">
               <a:ext uri="{FF2B5EF4-FFF2-40B4-BE49-F238E27FC236}">
-                <a16:creationId xmlns:a16="http://schemas.microsoft.com/office/drawing/2014/main" id="{254195FF-FBBA-447B-BCD7-85206C9CA1A7}"/>
+                <a16:creationId xmlns:a16="http://schemas.microsoft.com/office/drawing/2014/main" id="{6CDDAF27-462F-43D8-B7EE-DC8D7619A566}"/>
               </a:ext>
             </a:extLst>
           </p:cNvPr>
@@ -9312,7 +9320,7 @@
           <p:cNvPr id="5" name="">
             <a:extLst xmlns:a="http://schemas.openxmlformats.org/drawingml/2006/main">
               <a:ext uri="{FF2B5EF4-FFF2-40B4-BE49-F238E27FC236}">
-                <a16:creationId xmlns:a16="http://schemas.microsoft.com/office/drawing/2014/main" id="{FF35B684-BD99-4056-A17C-7E676CFA60BF}"/>
+                <a16:creationId xmlns:a16="http://schemas.microsoft.com/office/drawing/2014/main" id="{61D4286E-750C-40B9-96F3-E53CA7F7050D}"/>
               </a:ext>
             </a:extLst>
           </p:cNvPr>
@@ -9369,7 +9377,7 @@
           <p:cNvPr id="6" name="">
             <a:extLst xmlns:a="http://schemas.openxmlformats.org/drawingml/2006/main">
               <a:ext uri="{FF2B5EF4-FFF2-40B4-BE49-F238E27FC236}">
-                <a16:creationId xmlns:a16="http://schemas.microsoft.com/office/drawing/2014/main" id="{AEAA0C61-50C3-42BA-A775-BD3750B79A4E}"/>
+                <a16:creationId xmlns:a16="http://schemas.microsoft.com/office/drawing/2014/main" id="{F1B30044-A4C9-4F89-93C5-3587DDA821C4}"/>
               </a:ext>
             </a:extLst>
           </p:cNvPr>
@@ -9426,7 +9434,7 @@
           <p:cNvPr id="7" name="">
             <a:extLst xmlns:a="http://schemas.openxmlformats.org/drawingml/2006/main">
               <a:ext uri="{FF2B5EF4-FFF2-40B4-BE49-F238E27FC236}">
-                <a16:creationId xmlns:a16="http://schemas.microsoft.com/office/drawing/2014/main" id="{82F07F7D-9E86-4E7E-8D62-1424F5008EDF}"/>
+                <a16:creationId xmlns:a16="http://schemas.microsoft.com/office/drawing/2014/main" id="{46C84FA7-386C-42C1-981B-38764B45D85D}"/>
               </a:ext>
             </a:extLst>
           </p:cNvPr>
@@ -9458,7 +9466,7 @@
           <p:cNvPr id="8" name="">
             <a:extLst xmlns:a="http://schemas.openxmlformats.org/drawingml/2006/main">
               <a:ext uri="{FF2B5EF4-FFF2-40B4-BE49-F238E27FC236}">
-                <a16:creationId xmlns:a16="http://schemas.microsoft.com/office/drawing/2014/main" id="{1D00B6C4-E2CA-469E-9002-FB25CE3757E0}"/>
+                <a16:creationId xmlns:a16="http://schemas.microsoft.com/office/drawing/2014/main" id="{8037C605-8CE1-48BC-AD50-464603BB1B6F}"/>
               </a:ext>
             </a:extLst>
           </p:cNvPr>
@@ -9515,7 +9523,7 @@
           <p:cNvPr id="9" name="">
             <a:extLst xmlns:a="http://schemas.openxmlformats.org/drawingml/2006/main">
               <a:ext uri="{FF2B5EF4-FFF2-40B4-BE49-F238E27FC236}">
-                <a16:creationId xmlns:a16="http://schemas.microsoft.com/office/drawing/2014/main" id="{B6A05DAA-B7EE-4EA2-A059-92DF2272A4CB}"/>
+                <a16:creationId xmlns:a16="http://schemas.microsoft.com/office/drawing/2014/main" id="{0F24D333-248C-4291-A3BD-52178DD2AD87}"/>
               </a:ext>
             </a:extLst>
           </p:cNvPr>
@@ -9572,7 +9580,7 @@
           <p:cNvPr id="10" name="">
             <a:extLst xmlns:a="http://schemas.openxmlformats.org/drawingml/2006/main">
               <a:ext uri="{FF2B5EF4-FFF2-40B4-BE49-F238E27FC236}">
-                <a16:creationId xmlns:a16="http://schemas.microsoft.com/office/drawing/2014/main" id="{A931E803-B31D-4EB7-9F75-77C14CEEBBBC}"/>
+                <a16:creationId xmlns:a16="http://schemas.microsoft.com/office/drawing/2014/main" id="{F254B4F8-ACF4-4E18-AE40-B9CEA651DBA9}"/>
               </a:ext>
             </a:extLst>
           </p:cNvPr>
@@ -9629,7 +9637,7 @@
           <p:cNvPr id="11" name="">
             <a:extLst xmlns:a="http://schemas.openxmlformats.org/drawingml/2006/main">
               <a:ext uri="{FF2B5EF4-FFF2-40B4-BE49-F238E27FC236}">
-                <a16:creationId xmlns:a16="http://schemas.microsoft.com/office/drawing/2014/main" id="{4B517815-61AC-405B-925C-A8D7E076DCBB}"/>
+                <a16:creationId xmlns:a16="http://schemas.microsoft.com/office/drawing/2014/main" id="{01300071-E047-4CC6-9D5A-03F2438426B5}"/>
               </a:ext>
             </a:extLst>
           </p:cNvPr>
@@ -9686,7 +9694,7 @@
           <p:cNvPr id="12" name="">
             <a:extLst xmlns:a="http://schemas.openxmlformats.org/drawingml/2006/main">
               <a:ext uri="{FF2B5EF4-FFF2-40B4-BE49-F238E27FC236}">
-                <a16:creationId xmlns:a16="http://schemas.microsoft.com/office/drawing/2014/main" id="{0ABE2FCB-3647-4B34-9F7B-BA65C25ED96D}"/>
+                <a16:creationId xmlns:a16="http://schemas.microsoft.com/office/drawing/2014/main" id="{D5349C7C-FB76-4969-86A1-6AC88D655FD0}"/>
               </a:ext>
             </a:extLst>
           </p:cNvPr>
@@ -9718,7 +9726,7 @@
           <p:cNvPr id="13" name="">
             <a:extLst xmlns:a="http://schemas.openxmlformats.org/drawingml/2006/main">
               <a:ext uri="{FF2B5EF4-FFF2-40B4-BE49-F238E27FC236}">
-                <a16:creationId xmlns:a16="http://schemas.microsoft.com/office/drawing/2014/main" id="{79D944E6-F0A7-45DE-98B8-50F225B09712}"/>
+                <a16:creationId xmlns:a16="http://schemas.microsoft.com/office/drawing/2014/main" id="{6899BF41-851A-46C8-ACBF-E47F528EBFF7}"/>
               </a:ext>
             </a:extLst>
           </p:cNvPr>
@@ -9775,7 +9783,7 @@
           <p:cNvPr id="14" name="">
             <a:extLst xmlns:a="http://schemas.openxmlformats.org/drawingml/2006/main">
               <a:ext uri="{FF2B5EF4-FFF2-40B4-BE49-F238E27FC236}">
-                <a16:creationId xmlns:a16="http://schemas.microsoft.com/office/drawing/2014/main" id="{BE281D65-4B38-42F6-BEBE-5022A00AFB40}"/>
+                <a16:creationId xmlns:a16="http://schemas.microsoft.com/office/drawing/2014/main" id="{89DE97EA-DF2F-46BC-82B7-95996153354D}"/>
               </a:ext>
             </a:extLst>
           </p:cNvPr>
@@ -9830,7 +9838,7 @@
     </p:spTree>
     <p:extLst>
       <p:ext uri="{BB962C8B-B14F-4D97-AF65-F5344CB8AC3E}">
-        <p14:creationId xmlns:p14="http://schemas.microsoft.com/office/powerpoint/2010/main" val="1604933133"/>
+        <p14:creationId xmlns:p14="http://schemas.microsoft.com/office/powerpoint/2010/main" val="1600407531"/>
       </p:ext>
     </p:extLst>
   </p:cSld>
@@ -10031,7 +10039,7 @@
           <p:cNvPr id="16" name="">
             <a:extLst xmlns:a="http://schemas.openxmlformats.org/drawingml/2006/main">
               <a:ext uri="{FF2B5EF4-FFF2-40B4-BE49-F238E27FC236}">
-                <a16:creationId xmlns:a16="http://schemas.microsoft.com/office/drawing/2014/main" id="{4DFB6EEC-4DC1-451A-87D1-E52D625DE987}"/>
+                <a16:creationId xmlns:a16="http://schemas.microsoft.com/office/drawing/2014/main" id="{5E855FB6-CA54-45EF-9A5D-F30C739EE5A0}"/>
               </a:ext>
             </a:extLst>
           </p:cNvPr>
@@ -10063,7 +10071,7 @@
           <p:cNvPr id="2" name="">
             <a:extLst xmlns:a="http://schemas.openxmlformats.org/drawingml/2006/main">
               <a:ext uri="{FF2B5EF4-FFF2-40B4-BE49-F238E27FC236}">
-                <a16:creationId xmlns:a16="http://schemas.microsoft.com/office/drawing/2014/main" id="{0444E38D-DD97-4B9E-8BA9-FDEB5EFA8CA3}"/>
+                <a16:creationId xmlns:a16="http://schemas.microsoft.com/office/drawing/2014/main" id="{65706A56-643D-4A3E-874A-5435A4B26BFE}"/>
               </a:ext>
             </a:extLst>
           </p:cNvPr>
@@ -10120,7 +10128,7 @@
           <p:cNvPr id="3" name="">
             <a:extLst xmlns:a="http://schemas.openxmlformats.org/drawingml/2006/main">
               <a:ext uri="{FF2B5EF4-FFF2-40B4-BE49-F238E27FC236}">
-                <a16:creationId xmlns:a16="http://schemas.microsoft.com/office/drawing/2014/main" id="{CEFC9988-6F5E-4DA0-B453-8B5799885BBC}"/>
+                <a16:creationId xmlns:a16="http://schemas.microsoft.com/office/drawing/2014/main" id="{9FB35BF1-01C2-410B-8B5C-32F548A7DE04}"/>
               </a:ext>
             </a:extLst>
           </p:cNvPr>
@@ -10152,7 +10160,7 @@
           <p:cNvPr id="4" name="">
             <a:extLst xmlns:a="http://schemas.openxmlformats.org/drawingml/2006/main">
               <a:ext uri="{FF2B5EF4-FFF2-40B4-BE49-F238E27FC236}">
-                <a16:creationId xmlns:a16="http://schemas.microsoft.com/office/drawing/2014/main" id="{AA506498-FBDE-4A9F-AD32-0A586139F3D7}"/>
+                <a16:creationId xmlns:a16="http://schemas.microsoft.com/office/drawing/2014/main" id="{50759B9B-85B1-4AF6-A712-FA593342E648}"/>
               </a:ext>
             </a:extLst>
           </p:cNvPr>
@@ -10209,7 +10217,7 @@
           <p:cNvPr id="5" name="">
             <a:extLst xmlns:a="http://schemas.openxmlformats.org/drawingml/2006/main">
               <a:ext uri="{FF2B5EF4-FFF2-40B4-BE49-F238E27FC236}">
-                <a16:creationId xmlns:a16="http://schemas.microsoft.com/office/drawing/2014/main" id="{A7FF1BDB-C4BE-40B9-AD74-E35ED28AB8C3}"/>
+                <a16:creationId xmlns:a16="http://schemas.microsoft.com/office/drawing/2014/main" id="{8E2B414A-B4D3-41DA-9594-4E841E738BF2}"/>
               </a:ext>
             </a:extLst>
           </p:cNvPr>
@@ -10266,7 +10274,7 @@
           <p:cNvPr id="6" name="">
             <a:extLst xmlns:a="http://schemas.openxmlformats.org/drawingml/2006/main">
               <a:ext uri="{FF2B5EF4-FFF2-40B4-BE49-F238E27FC236}">
-                <a16:creationId xmlns:a16="http://schemas.microsoft.com/office/drawing/2014/main" id="{F78FE35F-B037-4C0D-83F5-6C9851773457}"/>
+                <a16:creationId xmlns:a16="http://schemas.microsoft.com/office/drawing/2014/main" id="{0751D8E6-E25C-4BE9-AD25-C00F0074BF02}"/>
               </a:ext>
             </a:extLst>
           </p:cNvPr>
@@ -10323,7 +10331,7 @@
           <p:cNvPr id="7" name="">
             <a:extLst xmlns:a="http://schemas.openxmlformats.org/drawingml/2006/main">
               <a:ext uri="{FF2B5EF4-FFF2-40B4-BE49-F238E27FC236}">
-                <a16:creationId xmlns:a16="http://schemas.microsoft.com/office/drawing/2014/main" id="{092A7DA4-2F36-43AC-9CE8-2BE1B20474A1}"/>
+                <a16:creationId xmlns:a16="http://schemas.microsoft.com/office/drawing/2014/main" id="{A0F92845-8699-4617-B885-1675C599E4B0}"/>
               </a:ext>
             </a:extLst>
           </p:cNvPr>
@@ -10355,7 +10363,7 @@
           <p:cNvPr id="8" name="">
             <a:extLst xmlns:a="http://schemas.openxmlformats.org/drawingml/2006/main">
               <a:ext uri="{FF2B5EF4-FFF2-40B4-BE49-F238E27FC236}">
-                <a16:creationId xmlns:a16="http://schemas.microsoft.com/office/drawing/2014/main" id="{B9C9CA17-A09A-40E8-90CF-CDA21389753B}"/>
+                <a16:creationId xmlns:a16="http://schemas.microsoft.com/office/drawing/2014/main" id="{8B4176D8-0C8D-4251-98E3-1F1577EE4358}"/>
               </a:ext>
             </a:extLst>
           </p:cNvPr>
@@ -10412,7 +10420,7 @@
           <p:cNvPr id="9" name="">
             <a:extLst xmlns:a="http://schemas.openxmlformats.org/drawingml/2006/main">
               <a:ext uri="{FF2B5EF4-FFF2-40B4-BE49-F238E27FC236}">
-                <a16:creationId xmlns:a16="http://schemas.microsoft.com/office/drawing/2014/main" id="{A272E0C6-1480-4F07-AD67-DB37E4393D68}"/>
+                <a16:creationId xmlns:a16="http://schemas.microsoft.com/office/drawing/2014/main" id="{ED286DB8-6ABD-4028-9C81-E585252C1092}"/>
               </a:ext>
             </a:extLst>
           </p:cNvPr>
@@ -10469,7 +10477,7 @@
           <p:cNvPr id="10" name="">
             <a:extLst xmlns:a="http://schemas.openxmlformats.org/drawingml/2006/main">
               <a:ext uri="{FF2B5EF4-FFF2-40B4-BE49-F238E27FC236}">
-                <a16:creationId xmlns:a16="http://schemas.microsoft.com/office/drawing/2014/main" id="{F33EBFC0-15C7-48C5-B39F-126072AB1BE9}"/>
+                <a16:creationId xmlns:a16="http://schemas.microsoft.com/office/drawing/2014/main" id="{126FD750-DE2A-4554-8669-79EDE7E2E7E8}"/>
               </a:ext>
             </a:extLst>
           </p:cNvPr>
@@ -10526,7 +10534,7 @@
           <p:cNvPr id="11" name="">
             <a:extLst xmlns:a="http://schemas.openxmlformats.org/drawingml/2006/main">
               <a:ext uri="{FF2B5EF4-FFF2-40B4-BE49-F238E27FC236}">
-                <a16:creationId xmlns:a16="http://schemas.microsoft.com/office/drawing/2014/main" id="{4D2C9648-A5EB-4085-8A84-6C391FF628C7}"/>
+                <a16:creationId xmlns:a16="http://schemas.microsoft.com/office/drawing/2014/main" id="{8B5D4CC1-B3E5-40DE-BD94-E87A8A967C5B}"/>
               </a:ext>
             </a:extLst>
           </p:cNvPr>
@@ -10583,7 +10591,7 @@
           <p:cNvPr id="12" name="">
             <a:extLst xmlns:a="http://schemas.openxmlformats.org/drawingml/2006/main">
               <a:ext uri="{FF2B5EF4-FFF2-40B4-BE49-F238E27FC236}">
-                <a16:creationId xmlns:a16="http://schemas.microsoft.com/office/drawing/2014/main" id="{4DE82F20-AEC2-4A51-86DE-CF8A6BAC1D07}"/>
+                <a16:creationId xmlns:a16="http://schemas.microsoft.com/office/drawing/2014/main" id="{A06640E6-91F8-449C-959D-BE68AB49DA16}"/>
               </a:ext>
             </a:extLst>
           </p:cNvPr>
@@ -10640,7 +10648,7 @@
           <p:cNvPr id="13" name="">
             <a:extLst xmlns:a="http://schemas.openxmlformats.org/drawingml/2006/main">
               <a:ext uri="{FF2B5EF4-FFF2-40B4-BE49-F238E27FC236}">
-                <a16:creationId xmlns:a16="http://schemas.microsoft.com/office/drawing/2014/main" id="{5F84CBF6-12A3-4360-AB29-21AA187223FA}"/>
+                <a16:creationId xmlns:a16="http://schemas.microsoft.com/office/drawing/2014/main" id="{57215453-0016-42F0-926F-65525958229E}"/>
               </a:ext>
             </a:extLst>
           </p:cNvPr>
@@ -10697,7 +10705,7 @@
           <p:cNvPr id="14" name="">
             <a:extLst xmlns:a="http://schemas.openxmlformats.org/drawingml/2006/main">
               <a:ext uri="{FF2B5EF4-FFF2-40B4-BE49-F238E27FC236}">
-                <a16:creationId xmlns:a16="http://schemas.microsoft.com/office/drawing/2014/main" id="{7701519A-59AB-4D28-80F8-272A036F8CB4}"/>
+                <a16:creationId xmlns:a16="http://schemas.microsoft.com/office/drawing/2014/main" id="{50A060D7-F078-4B55-AE0B-CC90FE2605FA}"/>
               </a:ext>
             </a:extLst>
           </p:cNvPr>
@@ -10754,7 +10762,7 @@
           <p:cNvPr id="15" name="">
             <a:extLst xmlns:a="http://schemas.openxmlformats.org/drawingml/2006/main">
               <a:ext uri="{FF2B5EF4-FFF2-40B4-BE49-F238E27FC236}">
-                <a16:creationId xmlns:a16="http://schemas.microsoft.com/office/drawing/2014/main" id="{D6673337-142A-465D-B1ED-EF4DB8C8A1A6}"/>
+                <a16:creationId xmlns:a16="http://schemas.microsoft.com/office/drawing/2014/main" id="{B92F3DE2-D52F-43DE-9E91-4BA383DD0B84}"/>
               </a:ext>
             </a:extLst>
           </p:cNvPr>
@@ -10809,7 +10817,7 @@
     </p:spTree>
     <p:extLst>
       <p:ext uri="{BB962C8B-B14F-4D97-AF65-F5344CB8AC3E}">
-        <p14:creationId xmlns:p14="http://schemas.microsoft.com/office/powerpoint/2010/main" val="2084291384"/>
+        <p14:creationId xmlns:p14="http://schemas.microsoft.com/office/powerpoint/2010/main" val="555462512"/>
       </p:ext>
     </p:extLst>
   </p:cSld>
@@ -10964,7 +10972,7 @@
           <p:cNvPr id="16" name="">
             <a:extLst xmlns:a="http://schemas.openxmlformats.org/drawingml/2006/main">
               <a:ext uri="{FF2B5EF4-FFF2-40B4-BE49-F238E27FC236}">
-                <a16:creationId xmlns:a16="http://schemas.microsoft.com/office/drawing/2014/main" id="{3B2F94F3-E797-4BC2-BEAF-94BCC5ADC5CF}"/>
+                <a16:creationId xmlns:a16="http://schemas.microsoft.com/office/drawing/2014/main" id="{05CBB07E-C835-4A02-B01A-0CDA486055AA}"/>
               </a:ext>
             </a:extLst>
           </p:cNvPr>
@@ -10996,7 +11004,7 @@
           <p:cNvPr id="2" name="">
             <a:extLst xmlns:a="http://schemas.openxmlformats.org/drawingml/2006/main">
               <a:ext uri="{FF2B5EF4-FFF2-40B4-BE49-F238E27FC236}">
-                <a16:creationId xmlns:a16="http://schemas.microsoft.com/office/drawing/2014/main" id="{F0B24984-CDC6-41AA-9FE5-CE1F7E896D28}"/>
+                <a16:creationId xmlns:a16="http://schemas.microsoft.com/office/drawing/2014/main" id="{F0274BCD-4292-489A-BCC1-CE72EE44B118}"/>
               </a:ext>
             </a:extLst>
           </p:cNvPr>
@@ -11053,7 +11061,7 @@
           <p:cNvPr id="3" name="">
             <a:extLst xmlns:a="http://schemas.openxmlformats.org/drawingml/2006/main">
               <a:ext uri="{FF2B5EF4-FFF2-40B4-BE49-F238E27FC236}">
-                <a16:creationId xmlns:a16="http://schemas.microsoft.com/office/drawing/2014/main" id="{F59DF3C6-4BD8-4FB5-B13A-5ECF52567BF0}"/>
+                <a16:creationId xmlns:a16="http://schemas.microsoft.com/office/drawing/2014/main" id="{1B67EDEA-7B69-4C10-ACC5-847F825E7088}"/>
               </a:ext>
             </a:extLst>
           </p:cNvPr>
@@ -11085,7 +11093,7 @@
           <p:cNvPr id="4" name="">
             <a:extLst xmlns:a="http://schemas.openxmlformats.org/drawingml/2006/main">
               <a:ext uri="{FF2B5EF4-FFF2-40B4-BE49-F238E27FC236}">
-                <a16:creationId xmlns:a16="http://schemas.microsoft.com/office/drawing/2014/main" id="{5E5180DB-340E-4152-986F-AD3BF6490550}"/>
+                <a16:creationId xmlns:a16="http://schemas.microsoft.com/office/drawing/2014/main" id="{B08E63C5-EEAF-45AC-A2B4-8D3BEB422536}"/>
               </a:ext>
             </a:extLst>
           </p:cNvPr>
@@ -11142,7 +11150,7 @@
           <p:cNvPr id="5" name="">
             <a:extLst xmlns:a="http://schemas.openxmlformats.org/drawingml/2006/main">
               <a:ext uri="{FF2B5EF4-FFF2-40B4-BE49-F238E27FC236}">
-                <a16:creationId xmlns:a16="http://schemas.microsoft.com/office/drawing/2014/main" id="{CEFD013B-E4FF-4E32-806C-BAFAF71B9FAC}"/>
+                <a16:creationId xmlns:a16="http://schemas.microsoft.com/office/drawing/2014/main" id="{051C322B-1C63-46E2-AC6C-47D43507757E}"/>
               </a:ext>
             </a:extLst>
           </p:cNvPr>
@@ -11199,7 +11207,7 @@
           <p:cNvPr id="6" name="">
             <a:extLst xmlns:a="http://schemas.openxmlformats.org/drawingml/2006/main">
               <a:ext uri="{FF2B5EF4-FFF2-40B4-BE49-F238E27FC236}">
-                <a16:creationId xmlns:a16="http://schemas.microsoft.com/office/drawing/2014/main" id="{93D40ED2-2E7B-4892-ADC9-3061AE57EC3E}"/>
+                <a16:creationId xmlns:a16="http://schemas.microsoft.com/office/drawing/2014/main" id="{4B692463-4288-47D6-8A5A-BD4F721B53F2}"/>
               </a:ext>
             </a:extLst>
           </p:cNvPr>
@@ -11256,7 +11264,7 @@
           <p:cNvPr id="7" name="">
             <a:extLst xmlns:a="http://schemas.openxmlformats.org/drawingml/2006/main">
               <a:ext uri="{FF2B5EF4-FFF2-40B4-BE49-F238E27FC236}">
-                <a16:creationId xmlns:a16="http://schemas.microsoft.com/office/drawing/2014/main" id="{7C101C5A-1FE4-47DB-BEFA-530E8263156D}"/>
+                <a16:creationId xmlns:a16="http://schemas.microsoft.com/office/drawing/2014/main" id="{209C0865-D203-473F-9D5F-0E5095B5C8D2}"/>
               </a:ext>
             </a:extLst>
           </p:cNvPr>
@@ -11288,7 +11296,7 @@
           <p:cNvPr id="8" name="">
             <a:extLst xmlns:a="http://schemas.openxmlformats.org/drawingml/2006/main">
               <a:ext uri="{FF2B5EF4-FFF2-40B4-BE49-F238E27FC236}">
-                <a16:creationId xmlns:a16="http://schemas.microsoft.com/office/drawing/2014/main" id="{9C089C9C-B7FB-47B2-B922-6B34FCB1FE95}"/>
+                <a16:creationId xmlns:a16="http://schemas.microsoft.com/office/drawing/2014/main" id="{E672681F-E105-4CFF-9D21-037A1DF9F3F9}"/>
               </a:ext>
             </a:extLst>
           </p:cNvPr>
@@ -11345,7 +11353,7 @@
           <p:cNvPr id="9" name="">
             <a:extLst xmlns:a="http://schemas.openxmlformats.org/drawingml/2006/main">
               <a:ext uri="{FF2B5EF4-FFF2-40B4-BE49-F238E27FC236}">
-                <a16:creationId xmlns:a16="http://schemas.microsoft.com/office/drawing/2014/main" id="{25248508-9332-47FD-BACA-3181ED6F943F}"/>
+                <a16:creationId xmlns:a16="http://schemas.microsoft.com/office/drawing/2014/main" id="{0CC6F61B-88D7-48AB-89B1-3273498D0852}"/>
               </a:ext>
             </a:extLst>
           </p:cNvPr>
@@ -11406,7 +11414,7 @@
           <p:nvPr/>
         </p:nvPicPr>
         <p:blipFill>
-          <a:blip xmlns:r="http://schemas.openxmlformats.org/officeDocument/2006/relationships" xmlns:a="http://schemas.openxmlformats.org/drawingml/2006/main" r:embed="R4400651d4e544b48"/>
+          <a:blip xmlns:r="http://schemas.openxmlformats.org/officeDocument/2006/relationships" xmlns:a="http://schemas.openxmlformats.org/drawingml/2006/main" r:embed="Rf4ca1bba4c724ca1"/>
           <a:stretch xmlns:a="http://schemas.openxmlformats.org/drawingml/2006/main"/>
         </p:blipFill>
         <p:spPr>
@@ -11424,7 +11432,7 @@
           <p:cNvPr id="11" name="">
             <a:extLst xmlns:a="http://schemas.openxmlformats.org/drawingml/2006/main">
               <a:ext uri="{FF2B5EF4-FFF2-40B4-BE49-F238E27FC236}">
-                <a16:creationId xmlns:a16="http://schemas.microsoft.com/office/drawing/2014/main" id="{E7EC6A75-C014-482F-A1F8-E78E53B5F809}"/>
+                <a16:creationId xmlns:a16="http://schemas.microsoft.com/office/drawing/2014/main" id="{D7E779CC-616F-4812-8D70-D5B8EBA01C44}"/>
               </a:ext>
             </a:extLst>
           </p:cNvPr>
@@ -11481,7 +11489,7 @@
           <p:cNvPr id="12" name="">
             <a:extLst xmlns:a="http://schemas.openxmlformats.org/drawingml/2006/main">
               <a:ext uri="{FF2B5EF4-FFF2-40B4-BE49-F238E27FC236}">
-                <a16:creationId xmlns:a16="http://schemas.microsoft.com/office/drawing/2014/main" id="{01251245-D1EB-4DA5-9ACD-601481F86874}"/>
+                <a16:creationId xmlns:a16="http://schemas.microsoft.com/office/drawing/2014/main" id="{3F108A94-089F-4ACE-8CCC-4171043A93BD}"/>
               </a:ext>
             </a:extLst>
           </p:cNvPr>
@@ -11538,7 +11546,7 @@
           <p:cNvPr id="13" name="">
             <a:extLst xmlns:a="http://schemas.openxmlformats.org/drawingml/2006/main">
               <a:ext uri="{FF2B5EF4-FFF2-40B4-BE49-F238E27FC236}">
-                <a16:creationId xmlns:a16="http://schemas.microsoft.com/office/drawing/2014/main" id="{A168EB7D-BE18-44F0-A5C0-FE4D216E167F}"/>
+                <a16:creationId xmlns:a16="http://schemas.microsoft.com/office/drawing/2014/main" id="{265DB3C8-877F-4E82-8183-DB2E288800DD}"/>
               </a:ext>
             </a:extLst>
           </p:cNvPr>
@@ -11570,7 +11578,7 @@
           <p:cNvPr id="14" name="">
             <a:extLst xmlns:a="http://schemas.openxmlformats.org/drawingml/2006/main">
               <a:ext uri="{FF2B5EF4-FFF2-40B4-BE49-F238E27FC236}">
-                <a16:creationId xmlns:a16="http://schemas.microsoft.com/office/drawing/2014/main" id="{8F2C1171-1D93-4F06-A3D5-7EF2BE1945F8}"/>
+                <a16:creationId xmlns:a16="http://schemas.microsoft.com/office/drawing/2014/main" id="{59B2C74E-1BE6-4370-AF2A-BE3F888CECBC}"/>
               </a:ext>
             </a:extLst>
           </p:cNvPr>
@@ -11627,7 +11635,7 @@
           <p:cNvPr id="15" name="">
             <a:extLst xmlns:a="http://schemas.openxmlformats.org/drawingml/2006/main">
               <a:ext uri="{FF2B5EF4-FFF2-40B4-BE49-F238E27FC236}">
-                <a16:creationId xmlns:a16="http://schemas.microsoft.com/office/drawing/2014/main" id="{89AA9B8A-5378-4B45-AC01-2F539E9ED718}"/>
+                <a16:creationId xmlns:a16="http://schemas.microsoft.com/office/drawing/2014/main" id="{BEA5245E-48AD-400F-A4F6-A472FE7AD719}"/>
               </a:ext>
             </a:extLst>
           </p:cNvPr>
@@ -11682,7 +11690,7 @@
     </p:spTree>
     <p:extLst>
       <p:ext uri="{BB962C8B-B14F-4D97-AF65-F5344CB8AC3E}">
-        <p14:creationId xmlns:p14="http://schemas.microsoft.com/office/powerpoint/2010/main" val="740901919"/>
+        <p14:creationId xmlns:p14="http://schemas.microsoft.com/office/powerpoint/2010/main" val="1740459570"/>
       </p:ext>
     </p:extLst>
   </p:cSld>
@@ -11837,7 +11845,7 @@
           <p:cNvPr id="23" name="">
             <a:extLst xmlns:a="http://schemas.openxmlformats.org/drawingml/2006/main">
               <a:ext uri="{FF2B5EF4-FFF2-40B4-BE49-F238E27FC236}">
-                <a16:creationId xmlns:a16="http://schemas.microsoft.com/office/drawing/2014/main" id="{E28BDF78-1F36-4607-8091-FC4FA24FE527}"/>
+                <a16:creationId xmlns:a16="http://schemas.microsoft.com/office/drawing/2014/main" id="{34928F27-5119-4EBC-BDBF-80B707D397A8}"/>
               </a:ext>
             </a:extLst>
           </p:cNvPr>
@@ -11869,7 +11877,7 @@
           <p:cNvPr id="2" name="">
             <a:extLst xmlns:a="http://schemas.openxmlformats.org/drawingml/2006/main">
               <a:ext uri="{FF2B5EF4-FFF2-40B4-BE49-F238E27FC236}">
-                <a16:creationId xmlns:a16="http://schemas.microsoft.com/office/drawing/2014/main" id="{D579BCAE-9B95-4F06-873A-3022BDA703C5}"/>
+                <a16:creationId xmlns:a16="http://schemas.microsoft.com/office/drawing/2014/main" id="{C5E53A96-741D-42B0-90C8-D659B1B5A13B}"/>
               </a:ext>
             </a:extLst>
           </p:cNvPr>
@@ -11926,7 +11934,7 @@
           <p:cNvPr id="3" name="">
             <a:extLst xmlns:a="http://schemas.openxmlformats.org/drawingml/2006/main">
               <a:ext uri="{FF2B5EF4-FFF2-40B4-BE49-F238E27FC236}">
-                <a16:creationId xmlns:a16="http://schemas.microsoft.com/office/drawing/2014/main" id="{923220C4-8AF0-4671-BEA0-190E2A579178}"/>
+                <a16:creationId xmlns:a16="http://schemas.microsoft.com/office/drawing/2014/main" id="{059AE0EB-9461-4455-A49E-2D8F874EE0F0}"/>
               </a:ext>
             </a:extLst>
           </p:cNvPr>
@@ -11958,7 +11966,7 @@
           <p:cNvPr id="4" name="">
             <a:extLst xmlns:a="http://schemas.openxmlformats.org/drawingml/2006/main">
               <a:ext uri="{FF2B5EF4-FFF2-40B4-BE49-F238E27FC236}">
-                <a16:creationId xmlns:a16="http://schemas.microsoft.com/office/drawing/2014/main" id="{F883DC88-0B1E-4C1C-A88E-74E4B7893E99}"/>
+                <a16:creationId xmlns:a16="http://schemas.microsoft.com/office/drawing/2014/main" id="{3C710C3E-17DD-4964-8AE7-2A2A206DA946}"/>
               </a:ext>
             </a:extLst>
           </p:cNvPr>
@@ -12015,7 +12023,7 @@
           <p:cNvPr id="5" name="">
             <a:extLst xmlns:a="http://schemas.openxmlformats.org/drawingml/2006/main">
               <a:ext uri="{FF2B5EF4-FFF2-40B4-BE49-F238E27FC236}">
-                <a16:creationId xmlns:a16="http://schemas.microsoft.com/office/drawing/2014/main" id="{566A9510-736A-4978-9F99-E0D0B046282C}"/>
+                <a16:creationId xmlns:a16="http://schemas.microsoft.com/office/drawing/2014/main" id="{0550CD58-21B6-4C5E-AA36-773305D679E7}"/>
               </a:ext>
             </a:extLst>
           </p:cNvPr>
@@ -12072,7 +12080,7 @@
           <p:cNvPr id="6" name="">
             <a:extLst xmlns:a="http://schemas.openxmlformats.org/drawingml/2006/main">
               <a:ext uri="{FF2B5EF4-FFF2-40B4-BE49-F238E27FC236}">
-                <a16:creationId xmlns:a16="http://schemas.microsoft.com/office/drawing/2014/main" id="{42A0C04E-035F-4BDC-9B4B-7C711AF35765}"/>
+                <a16:creationId xmlns:a16="http://schemas.microsoft.com/office/drawing/2014/main" id="{4292DC22-A8C9-41AD-8183-0F222D533D1F}"/>
               </a:ext>
             </a:extLst>
           </p:cNvPr>
@@ -12129,7 +12137,7 @@
           <p:cNvPr id="7" name="">
             <a:extLst xmlns:a="http://schemas.openxmlformats.org/drawingml/2006/main">
               <a:ext uri="{FF2B5EF4-FFF2-40B4-BE49-F238E27FC236}">
-                <a16:creationId xmlns:a16="http://schemas.microsoft.com/office/drawing/2014/main" id="{DCAE76F7-BB03-492E-9BA8-4F6DE16BEDEC}"/>
+                <a16:creationId xmlns:a16="http://schemas.microsoft.com/office/drawing/2014/main" id="{64178308-8A26-461B-82DB-ACF12EFBF630}"/>
               </a:ext>
             </a:extLst>
           </p:cNvPr>
@@ -12161,7 +12169,7 @@
           <p:cNvPr id="8" name="">
             <a:extLst xmlns:a="http://schemas.openxmlformats.org/drawingml/2006/main">
               <a:ext uri="{FF2B5EF4-FFF2-40B4-BE49-F238E27FC236}">
-                <a16:creationId xmlns:a16="http://schemas.microsoft.com/office/drawing/2014/main" id="{29F31434-2943-41C2-99D9-AE9FFE4CB686}"/>
+                <a16:creationId xmlns:a16="http://schemas.microsoft.com/office/drawing/2014/main" id="{AE674269-E411-4623-9EAA-6F5197F13635}"/>
               </a:ext>
             </a:extLst>
           </p:cNvPr>
@@ -12218,7 +12226,7 @@
           <p:cNvPr id="9" name="">
             <a:extLst xmlns:a="http://schemas.openxmlformats.org/drawingml/2006/main">
               <a:ext uri="{FF2B5EF4-FFF2-40B4-BE49-F238E27FC236}">
-                <a16:creationId xmlns:a16="http://schemas.microsoft.com/office/drawing/2014/main" id="{A2B260E9-25E2-4215-98E7-F946A11F476A}"/>
+                <a16:creationId xmlns:a16="http://schemas.microsoft.com/office/drawing/2014/main" id="{B0167759-4CF8-41FF-A24D-984C75BB9122}"/>
               </a:ext>
             </a:extLst>
           </p:cNvPr>
@@ -12275,7 +12283,7 @@
           <p:cNvPr id="10" name="">
             <a:extLst xmlns:a="http://schemas.openxmlformats.org/drawingml/2006/main">
               <a:ext uri="{FF2B5EF4-FFF2-40B4-BE49-F238E27FC236}">
-                <a16:creationId xmlns:a16="http://schemas.microsoft.com/office/drawing/2014/main" id="{4E5AD2EB-DA6F-4789-AAC7-2757C31488D5}"/>
+                <a16:creationId xmlns:a16="http://schemas.microsoft.com/office/drawing/2014/main" id="{AB7EC477-87ED-4E41-865D-5002FD51CD37}"/>
               </a:ext>
             </a:extLst>
           </p:cNvPr>
@@ -12309,7 +12317,7 @@
           <p:cNvPr id="11" name="">
             <a:extLst xmlns:a="http://schemas.openxmlformats.org/drawingml/2006/main">
               <a:ext uri="{FF2B5EF4-FFF2-40B4-BE49-F238E27FC236}">
-                <a16:creationId xmlns:a16="http://schemas.microsoft.com/office/drawing/2014/main" id="{6D2454B4-E9B6-4E62-9E8D-5C59CC10440C}"/>
+                <a16:creationId xmlns:a16="http://schemas.microsoft.com/office/drawing/2014/main" id="{75F0F6AF-5177-450D-8465-F18983548C5C}"/>
               </a:ext>
             </a:extLst>
           </p:cNvPr>
@@ -12341,7 +12349,7 @@
           <p:cNvPr id="12" name="">
             <a:extLst xmlns:a="http://schemas.openxmlformats.org/drawingml/2006/main">
               <a:ext uri="{FF2B5EF4-FFF2-40B4-BE49-F238E27FC236}">
-                <a16:creationId xmlns:a16="http://schemas.microsoft.com/office/drawing/2014/main" id="{3D87B670-194C-4EA3-B181-2F98DCB0BB5D}"/>
+                <a16:creationId xmlns:a16="http://schemas.microsoft.com/office/drawing/2014/main" id="{0786C54C-511B-4281-8C27-74B010D54329}"/>
               </a:ext>
             </a:extLst>
           </p:cNvPr>
@@ -12398,7 +12406,7 @@
           <p:cNvPr id="13" name="">
             <a:extLst xmlns:a="http://schemas.openxmlformats.org/drawingml/2006/main">
               <a:ext uri="{FF2B5EF4-FFF2-40B4-BE49-F238E27FC236}">
-                <a16:creationId xmlns:a16="http://schemas.microsoft.com/office/drawing/2014/main" id="{58D51F2A-1A42-423D-A321-49CCF58F2AED}"/>
+                <a16:creationId xmlns:a16="http://schemas.microsoft.com/office/drawing/2014/main" id="{7919E206-D87B-4547-B8EB-2E2AC031E438}"/>
               </a:ext>
             </a:extLst>
           </p:cNvPr>
@@ -12455,7 +12463,7 @@
           <p:cNvPr id="14" name="">
             <a:extLst xmlns:a="http://schemas.openxmlformats.org/drawingml/2006/main">
               <a:ext uri="{FF2B5EF4-FFF2-40B4-BE49-F238E27FC236}">
-                <a16:creationId xmlns:a16="http://schemas.microsoft.com/office/drawing/2014/main" id="{B2A2FF38-97BC-4C83-BE11-F6FDD3E6C5A9}"/>
+                <a16:creationId xmlns:a16="http://schemas.microsoft.com/office/drawing/2014/main" id="{0C981AA0-50FE-482C-BF46-B6E2DEA8E134}"/>
               </a:ext>
             </a:extLst>
           </p:cNvPr>
@@ -12489,7 +12497,7 @@
           <p:cNvPr id="15" name="">
             <a:extLst xmlns:a="http://schemas.openxmlformats.org/drawingml/2006/main">
               <a:ext uri="{FF2B5EF4-FFF2-40B4-BE49-F238E27FC236}">
-                <a16:creationId xmlns:a16="http://schemas.microsoft.com/office/drawing/2014/main" id="{2C6AD831-3AB8-4333-A705-88A3AE3D9E45}"/>
+                <a16:creationId xmlns:a16="http://schemas.microsoft.com/office/drawing/2014/main" id="{2058E8D9-E69D-4678-BFDD-5642EB68E4F6}"/>
               </a:ext>
             </a:extLst>
           </p:cNvPr>
@@ -12521,7 +12529,7 @@
           <p:cNvPr id="16" name="">
             <a:extLst xmlns:a="http://schemas.openxmlformats.org/drawingml/2006/main">
               <a:ext uri="{FF2B5EF4-FFF2-40B4-BE49-F238E27FC236}">
-                <a16:creationId xmlns:a16="http://schemas.microsoft.com/office/drawing/2014/main" id="{576CC697-0EAA-4EB0-9100-139836E8DBDB}"/>
+                <a16:creationId xmlns:a16="http://schemas.microsoft.com/office/drawing/2014/main" id="{AC676FA2-732F-4F06-B118-227045832351}"/>
               </a:ext>
             </a:extLst>
           </p:cNvPr>
@@ -12578,7 +12586,7 @@
           <p:cNvPr id="17" name="">
             <a:extLst xmlns:a="http://schemas.openxmlformats.org/drawingml/2006/main">
               <a:ext uri="{FF2B5EF4-FFF2-40B4-BE49-F238E27FC236}">
-                <a16:creationId xmlns:a16="http://schemas.microsoft.com/office/drawing/2014/main" id="{A4ECB540-AE20-4621-A96C-93C25BEE38F3}"/>
+                <a16:creationId xmlns:a16="http://schemas.microsoft.com/office/drawing/2014/main" id="{E3A26B8D-EFAF-408D-95F3-273AFEB637EB}"/>
               </a:ext>
             </a:extLst>
           </p:cNvPr>
@@ -12635,7 +12643,7 @@
           <p:cNvPr id="18" name="">
             <a:extLst xmlns:a="http://schemas.openxmlformats.org/drawingml/2006/main">
               <a:ext uri="{FF2B5EF4-FFF2-40B4-BE49-F238E27FC236}">
-                <a16:creationId xmlns:a16="http://schemas.microsoft.com/office/drawing/2014/main" id="{2D8771B8-5839-4B60-B617-DF328C8F47FC}"/>
+                <a16:creationId xmlns:a16="http://schemas.microsoft.com/office/drawing/2014/main" id="{29C074E2-BD38-4CC7-913F-ED1AFB98B9A0}"/>
               </a:ext>
             </a:extLst>
           </p:cNvPr>
@@ -12669,7 +12677,7 @@
           <p:cNvPr id="19" name="">
             <a:extLst xmlns:a="http://schemas.openxmlformats.org/drawingml/2006/main">
               <a:ext uri="{FF2B5EF4-FFF2-40B4-BE49-F238E27FC236}">
-                <a16:creationId xmlns:a16="http://schemas.microsoft.com/office/drawing/2014/main" id="{500CE210-1564-4BB4-9C70-4FDB87F4A4FA}"/>
+                <a16:creationId xmlns:a16="http://schemas.microsoft.com/office/drawing/2014/main" id="{A3B6F0FC-0493-4193-9E10-165DCC5A24E0}"/>
               </a:ext>
             </a:extLst>
           </p:cNvPr>
@@ -12701,7 +12709,7 @@
           <p:cNvPr id="20" name="">
             <a:extLst xmlns:a="http://schemas.openxmlformats.org/drawingml/2006/main">
               <a:ext uri="{FF2B5EF4-FFF2-40B4-BE49-F238E27FC236}">
-                <a16:creationId xmlns:a16="http://schemas.microsoft.com/office/drawing/2014/main" id="{8C98DAAB-3ED3-472E-9F59-DA4132AB520F}"/>
+                <a16:creationId xmlns:a16="http://schemas.microsoft.com/office/drawing/2014/main" id="{6AD96DCB-C8F7-47AD-8754-1ACEC20B6A3D}"/>
               </a:ext>
             </a:extLst>
           </p:cNvPr>
@@ -12758,7 +12766,7 @@
           <p:cNvPr id="21" name="">
             <a:extLst xmlns:a="http://schemas.openxmlformats.org/drawingml/2006/main">
               <a:ext uri="{FF2B5EF4-FFF2-40B4-BE49-F238E27FC236}">
-                <a16:creationId xmlns:a16="http://schemas.microsoft.com/office/drawing/2014/main" id="{C7779F4C-9413-414D-B7DB-507930918375}"/>
+                <a16:creationId xmlns:a16="http://schemas.microsoft.com/office/drawing/2014/main" id="{2575789B-C790-495B-959B-B59F92CA14B1}"/>
               </a:ext>
             </a:extLst>
           </p:cNvPr>
@@ -12815,7 +12823,7 @@
           <p:cNvPr id="22" name="">
             <a:extLst xmlns:a="http://schemas.openxmlformats.org/drawingml/2006/main">
               <a:ext uri="{FF2B5EF4-FFF2-40B4-BE49-F238E27FC236}">
-                <a16:creationId xmlns:a16="http://schemas.microsoft.com/office/drawing/2014/main" id="{DEAFFD37-9CBA-43DE-8CC8-D5AEB456FD3D}"/>
+                <a16:creationId xmlns:a16="http://schemas.microsoft.com/office/drawing/2014/main" id="{7BC65398-691C-48E1-8559-C38988EFB26E}"/>
               </a:ext>
             </a:extLst>
           </p:cNvPr>
@@ -12870,7 +12878,7 @@
     </p:spTree>
     <p:extLst>
       <p:ext uri="{BB962C8B-B14F-4D97-AF65-F5344CB8AC3E}">
-        <p14:creationId xmlns:p14="http://schemas.microsoft.com/office/powerpoint/2010/main" val="1751777648"/>
+        <p14:creationId xmlns:p14="http://schemas.microsoft.com/office/powerpoint/2010/main" val="986632440"/>
       </p:ext>
     </p:extLst>
   </p:cSld>
@@ -13071,7 +13079,7 @@
           <p:cNvPr id="22" name="">
             <a:extLst xmlns:a="http://schemas.openxmlformats.org/drawingml/2006/main">
               <a:ext uri="{FF2B5EF4-FFF2-40B4-BE49-F238E27FC236}">
-                <a16:creationId xmlns:a16="http://schemas.microsoft.com/office/drawing/2014/main" id="{238C2A5B-8C86-4E73-8B61-5ED6EB229263}"/>
+                <a16:creationId xmlns:a16="http://schemas.microsoft.com/office/drawing/2014/main" id="{C243F7F4-E242-4375-8E3C-8BBF93FDC968}"/>
               </a:ext>
             </a:extLst>
           </p:cNvPr>
@@ -13103,7 +13111,7 @@
           <p:cNvPr id="2" name="">
             <a:extLst xmlns:a="http://schemas.openxmlformats.org/drawingml/2006/main">
               <a:ext uri="{FF2B5EF4-FFF2-40B4-BE49-F238E27FC236}">
-                <a16:creationId xmlns:a16="http://schemas.microsoft.com/office/drawing/2014/main" id="{589BA65D-60F9-4467-AE4A-79A2992FFF1F}"/>
+                <a16:creationId xmlns:a16="http://schemas.microsoft.com/office/drawing/2014/main" id="{4EFC4BB3-EA84-440D-AB48-78A42C3C0FB4}"/>
               </a:ext>
             </a:extLst>
           </p:cNvPr>
@@ -13160,7 +13168,7 @@
           <p:cNvPr id="3" name="">
             <a:extLst xmlns:a="http://schemas.openxmlformats.org/drawingml/2006/main">
               <a:ext uri="{FF2B5EF4-FFF2-40B4-BE49-F238E27FC236}">
-                <a16:creationId xmlns:a16="http://schemas.microsoft.com/office/drawing/2014/main" id="{0EC7207B-F22F-42E9-83D1-9F3B87CBFB86}"/>
+                <a16:creationId xmlns:a16="http://schemas.microsoft.com/office/drawing/2014/main" id="{A2EED5DC-92DD-4F6A-82ED-7EF704C7854F}"/>
               </a:ext>
             </a:extLst>
           </p:cNvPr>
@@ -13192,7 +13200,7 @@
           <p:cNvPr id="4" name="">
             <a:extLst xmlns:a="http://schemas.openxmlformats.org/drawingml/2006/main">
               <a:ext uri="{FF2B5EF4-FFF2-40B4-BE49-F238E27FC236}">
-                <a16:creationId xmlns:a16="http://schemas.microsoft.com/office/drawing/2014/main" id="{6AEA105F-BA8E-4F16-8D24-8EC575C46244}"/>
+                <a16:creationId xmlns:a16="http://schemas.microsoft.com/office/drawing/2014/main" id="{4F4204CB-5DAC-40D1-918E-5E3CC147FF69}"/>
               </a:ext>
             </a:extLst>
           </p:cNvPr>
@@ -13249,7 +13257,7 @@
           <p:cNvPr id="5" name="">
             <a:extLst xmlns:a="http://schemas.openxmlformats.org/drawingml/2006/main">
               <a:ext uri="{FF2B5EF4-FFF2-40B4-BE49-F238E27FC236}">
-                <a16:creationId xmlns:a16="http://schemas.microsoft.com/office/drawing/2014/main" id="{4295C82C-6ECB-4004-991A-3891EE4C6653}"/>
+                <a16:creationId xmlns:a16="http://schemas.microsoft.com/office/drawing/2014/main" id="{5499C209-2665-494A-B711-CC513E2B303D}"/>
               </a:ext>
             </a:extLst>
           </p:cNvPr>
@@ -13306,7 +13314,7 @@
           <p:cNvPr id="6" name="">
             <a:extLst xmlns:a="http://schemas.openxmlformats.org/drawingml/2006/main">
               <a:ext uri="{FF2B5EF4-FFF2-40B4-BE49-F238E27FC236}">
-                <a16:creationId xmlns:a16="http://schemas.microsoft.com/office/drawing/2014/main" id="{082A9FD0-4C13-4E85-9BE5-974888E0EB87}"/>
+                <a16:creationId xmlns:a16="http://schemas.microsoft.com/office/drawing/2014/main" id="{FD944489-B393-4622-9E39-F1C59B9004F7}"/>
               </a:ext>
             </a:extLst>
           </p:cNvPr>
@@ -13363,7 +13371,7 @@
           <p:cNvPr id="7" name="">
             <a:extLst xmlns:a="http://schemas.openxmlformats.org/drawingml/2006/main">
               <a:ext uri="{FF2B5EF4-FFF2-40B4-BE49-F238E27FC236}">
-                <a16:creationId xmlns:a16="http://schemas.microsoft.com/office/drawing/2014/main" id="{EF6506D9-F8DC-4A96-974A-775F121BD843}"/>
+                <a16:creationId xmlns:a16="http://schemas.microsoft.com/office/drawing/2014/main" id="{0EB810C7-F906-420B-8296-8AF23EA01505}"/>
               </a:ext>
             </a:extLst>
           </p:cNvPr>
@@ -13395,7 +13403,7 @@
           <p:cNvPr id="8" name="">
             <a:extLst xmlns:a="http://schemas.openxmlformats.org/drawingml/2006/main">
               <a:ext uri="{FF2B5EF4-FFF2-40B4-BE49-F238E27FC236}">
-                <a16:creationId xmlns:a16="http://schemas.microsoft.com/office/drawing/2014/main" id="{0143F8B5-15B1-4FC0-982B-208C572FA766}"/>
+                <a16:creationId xmlns:a16="http://schemas.microsoft.com/office/drawing/2014/main" id="{58CF1327-B4FC-4CE4-B001-5DFBCBCA8170}"/>
               </a:ext>
             </a:extLst>
           </p:cNvPr>
@@ -13452,7 +13460,7 @@
           <p:cNvPr id="9" name="">
             <a:extLst xmlns:a="http://schemas.openxmlformats.org/drawingml/2006/main">
               <a:ext uri="{FF2B5EF4-FFF2-40B4-BE49-F238E27FC236}">
-                <a16:creationId xmlns:a16="http://schemas.microsoft.com/office/drawing/2014/main" id="{4D1854DE-A3B3-41E8-91E7-290E7831BFE1}"/>
+                <a16:creationId xmlns:a16="http://schemas.microsoft.com/office/drawing/2014/main" id="{348F407E-B869-4650-9D85-DFA4E21E71A8}"/>
               </a:ext>
             </a:extLst>
           </p:cNvPr>
@@ -13509,7 +13517,7 @@
           <p:cNvPr id="10" name="">
             <a:extLst xmlns:a="http://schemas.openxmlformats.org/drawingml/2006/main">
               <a:ext uri="{FF2B5EF4-FFF2-40B4-BE49-F238E27FC236}">
-                <a16:creationId xmlns:a16="http://schemas.microsoft.com/office/drawing/2014/main" id="{281F985F-88BF-421C-A5A8-082EF22F30EB}"/>
+                <a16:creationId xmlns:a16="http://schemas.microsoft.com/office/drawing/2014/main" id="{968189BD-5010-4758-80F5-BC4E5824F233}"/>
               </a:ext>
             </a:extLst>
           </p:cNvPr>
@@ -13543,7 +13551,7 @@
           <p:cNvPr id="11" name="">
             <a:extLst xmlns:a="http://schemas.openxmlformats.org/drawingml/2006/main">
               <a:ext uri="{FF2B5EF4-FFF2-40B4-BE49-F238E27FC236}">
-                <a16:creationId xmlns:a16="http://schemas.microsoft.com/office/drawing/2014/main" id="{DDEAF968-16DE-4023-8482-9748521F651B}"/>
+                <a16:creationId xmlns:a16="http://schemas.microsoft.com/office/drawing/2014/main" id="{07B795B7-A641-4453-8907-A759436FFF3A}"/>
               </a:ext>
             </a:extLst>
           </p:cNvPr>
@@ -13575,7 +13583,7 @@
           <p:cNvPr id="12" name="">
             <a:extLst xmlns:a="http://schemas.openxmlformats.org/drawingml/2006/main">
               <a:ext uri="{FF2B5EF4-FFF2-40B4-BE49-F238E27FC236}">
-                <a16:creationId xmlns:a16="http://schemas.microsoft.com/office/drawing/2014/main" id="{56972CED-B761-4AE7-8677-E2EB13BACECE}"/>
+                <a16:creationId xmlns:a16="http://schemas.microsoft.com/office/drawing/2014/main" id="{056C28D4-7792-48B0-BB0A-8B601855B3DA}"/>
               </a:ext>
             </a:extLst>
           </p:cNvPr>
@@ -13632,7 +13640,7 @@
           <p:cNvPr id="13" name="">
             <a:extLst xmlns:a="http://schemas.openxmlformats.org/drawingml/2006/main">
               <a:ext uri="{FF2B5EF4-FFF2-40B4-BE49-F238E27FC236}">
-                <a16:creationId xmlns:a16="http://schemas.microsoft.com/office/drawing/2014/main" id="{096B1762-BEB1-4952-8D71-6AD8DB7C13CD}"/>
+                <a16:creationId xmlns:a16="http://schemas.microsoft.com/office/drawing/2014/main" id="{386EFA7B-3EFC-422A-93AA-5C87F8D8F760}"/>
               </a:ext>
             </a:extLst>
           </p:cNvPr>
@@ -13689,7 +13697,7 @@
           <p:cNvPr id="14" name="">
             <a:extLst xmlns:a="http://schemas.openxmlformats.org/drawingml/2006/main">
               <a:ext uri="{FF2B5EF4-FFF2-40B4-BE49-F238E27FC236}">
-                <a16:creationId xmlns:a16="http://schemas.microsoft.com/office/drawing/2014/main" id="{56C4060C-D6EB-40BC-9C29-7F3DC925D9B1}"/>
+                <a16:creationId xmlns:a16="http://schemas.microsoft.com/office/drawing/2014/main" id="{CCAE72EB-0A88-4AE7-A497-C4E535F11D70}"/>
               </a:ext>
             </a:extLst>
           </p:cNvPr>
@@ -13723,7 +13731,7 @@
           <p:cNvPr id="15" name="">
             <a:extLst xmlns:a="http://schemas.openxmlformats.org/drawingml/2006/main">
               <a:ext uri="{FF2B5EF4-FFF2-40B4-BE49-F238E27FC236}">
-                <a16:creationId xmlns:a16="http://schemas.microsoft.com/office/drawing/2014/main" id="{C32C72E5-16FC-46F2-BF01-A238B3FC4476}"/>
+                <a16:creationId xmlns:a16="http://schemas.microsoft.com/office/drawing/2014/main" id="{7320B613-D0D7-4C83-B219-3FCCC87B4A0C}"/>
               </a:ext>
             </a:extLst>
           </p:cNvPr>
@@ -13755,7 +13763,7 @@
           <p:cNvPr id="16" name="">
             <a:extLst xmlns:a="http://schemas.openxmlformats.org/drawingml/2006/main">
               <a:ext uri="{FF2B5EF4-FFF2-40B4-BE49-F238E27FC236}">
-                <a16:creationId xmlns:a16="http://schemas.microsoft.com/office/drawing/2014/main" id="{ADA08323-29EF-4D44-99CF-055F6437A309}"/>
+                <a16:creationId xmlns:a16="http://schemas.microsoft.com/office/drawing/2014/main" id="{1B0E6C46-78AA-4898-8549-DCBCE140DBB5}"/>
               </a:ext>
             </a:extLst>
           </p:cNvPr>
@@ -13812,7 +13820,7 @@
           <p:cNvPr id="17" name="">
             <a:extLst xmlns:a="http://schemas.openxmlformats.org/drawingml/2006/main">
               <a:ext uri="{FF2B5EF4-FFF2-40B4-BE49-F238E27FC236}">
-                <a16:creationId xmlns:a16="http://schemas.microsoft.com/office/drawing/2014/main" id="{D2F6FC31-E413-4BDF-B182-4C24DE88F4C1}"/>
+                <a16:creationId xmlns:a16="http://schemas.microsoft.com/office/drawing/2014/main" id="{4C0A2239-B082-4A86-96AC-05C892794770}"/>
               </a:ext>
             </a:extLst>
           </p:cNvPr>
@@ -13869,7 +13877,7 @@
           <p:cNvPr id="18" name="">
             <a:extLst xmlns:a="http://schemas.openxmlformats.org/drawingml/2006/main">
               <a:ext uri="{FF2B5EF4-FFF2-40B4-BE49-F238E27FC236}">
-                <a16:creationId xmlns:a16="http://schemas.microsoft.com/office/drawing/2014/main" id="{103EF159-0C64-426D-8147-69040B6CAEC8}"/>
+                <a16:creationId xmlns:a16="http://schemas.microsoft.com/office/drawing/2014/main" id="{27F1A7DE-6816-4703-86EB-F638CA3ED905}"/>
               </a:ext>
             </a:extLst>
           </p:cNvPr>
@@ -13903,7 +13911,7 @@
           <p:cNvPr id="19" name="">
             <a:extLst xmlns:a="http://schemas.openxmlformats.org/drawingml/2006/main">
               <a:ext uri="{FF2B5EF4-FFF2-40B4-BE49-F238E27FC236}">
-                <a16:creationId xmlns:a16="http://schemas.microsoft.com/office/drawing/2014/main" id="{68AFA760-E06C-45C4-AFB3-9918D3BD48FB}"/>
+                <a16:creationId xmlns:a16="http://schemas.microsoft.com/office/drawing/2014/main" id="{4363CC4C-ADFE-4183-96A8-26C8600F29C3}"/>
               </a:ext>
             </a:extLst>
           </p:cNvPr>
@@ -13935,7 +13943,7 @@
           <p:cNvPr id="20" name="">
             <a:extLst xmlns:a="http://schemas.openxmlformats.org/drawingml/2006/main">
               <a:ext uri="{FF2B5EF4-FFF2-40B4-BE49-F238E27FC236}">
-                <a16:creationId xmlns:a16="http://schemas.microsoft.com/office/drawing/2014/main" id="{1690DFE7-3430-41DE-BF78-7FD3CE8E57FF}"/>
+                <a16:creationId xmlns:a16="http://schemas.microsoft.com/office/drawing/2014/main" id="{663B0F9D-6F01-4710-877F-CAECA1E17F33}"/>
               </a:ext>
             </a:extLst>
           </p:cNvPr>
@@ -13992,7 +14000,7 @@
           <p:cNvPr id="21" name="">
             <a:extLst xmlns:a="http://schemas.openxmlformats.org/drawingml/2006/main">
               <a:ext uri="{FF2B5EF4-FFF2-40B4-BE49-F238E27FC236}">
-                <a16:creationId xmlns:a16="http://schemas.microsoft.com/office/drawing/2014/main" id="{051DC2B7-48D7-4E05-828A-2B920C43581C}"/>
+                <a16:creationId xmlns:a16="http://schemas.microsoft.com/office/drawing/2014/main" id="{71E25066-7100-4C92-AF6F-6866AEBCCB99}"/>
               </a:ext>
             </a:extLst>
           </p:cNvPr>
@@ -14047,7 +14055,7 @@
     </p:spTree>
     <p:extLst>
       <p:ext uri="{BB962C8B-B14F-4D97-AF65-F5344CB8AC3E}">
-        <p14:creationId xmlns:p14="http://schemas.microsoft.com/office/powerpoint/2010/main" val="674782424"/>
+        <p14:creationId xmlns:p14="http://schemas.microsoft.com/office/powerpoint/2010/main" val="1602772485"/>
       </p:ext>
     </p:extLst>
   </p:cSld>
